--- a/2026-Q4/12-HouseholdsAndTeachers/Week12-HouseholdsAndTeachers.pptx
+++ b/2026-Q4/12-HouseholdsAndTeachers/Week12-HouseholdsAndTeachers.pptx
@@ -4,6 +4,9 @@
   <p:sldMasterIdLst>
     <p:sldMasterId id="2147483648" r:id="rId1"/>
   </p:sldMasterIdLst>
+  <p:notesMasterIdLst>
+    <p:notesMasterId r:id="rId9"/>
+  </p:notesMasterIdLst>
   <p:sldIdLst>
     <p:sldId id="256" r:id="rId2"/>
     <p:sldId id="257" r:id="rId3"/>
@@ -13,10 +16,7 @@
     <p:sldId id="261" r:id="rId7"/>
     <p:sldId id="262" r:id="rId8"/>
   </p:sldIdLst>
-  <p:notesMasterIdLst>
-    <p:notesMasterId r:id="rId9"/>
-  </p:notesMasterIdLst>
-  <p:sldSz cx="9144000" cy="6858000"/>
+  <p:sldSz cx="9144000" cy="6858000" type="screen4x3"/>
   <p:notesSz cx="6858000" cy="9144000"/>
   <p:defaultTextStyle>
     <a:lvl1pPr marL="0" algn="l" defTabSz="914400" rtl="0" eaLnBrk="1" latinLnBrk="0" hangingPunct="1">
@@ -110,6 +110,11 @@
       </a:defRPr>
     </a:lvl9pPr>
   </p:defaultTextStyle>
+  <p:extLst>
+    <p:ext uri="{EFAFB233-063F-42B5-8137-9DF3F51BA10A}">
+      <p15:sldGuideLst xmlns:p15="http://schemas.microsoft.com/office/powerpoint/2012/main"/>
+    </p:ext>
+  </p:extLst>
 </p:presentation>
 </file>
 
@@ -135,234 +140,10 @@
           <a:chExt cx="0" cy="0"/>
         </a:xfrm>
       </p:grpSpPr>
-      <p:sp>
-        <p:nvSpPr>
-          <p:cNvPr id="2" name="Header Placeholder 1"/>
-          <p:cNvSpPr>
-            <a:spLocks noGrp="1"/>
-          </p:cNvSpPr>
-          <p:nvPr>
-            <p:ph type="hdr" sz="quarter"/>
-          </p:nvPr>
-        </p:nvSpPr>
-        <p:spPr>
-          <a:xfrm>
-            <a:off x="0" y="0"/>
-            <a:ext cx="2971800" cy="458788"/>
-          </a:xfrm>
-          <a:prstGeom prst="rect">
-            <a:avLst/>
-          </a:prstGeom>
-        </p:spPr>
-        <p:txBody>
-          <a:bodyPr vert="horz" lIns="91440" tIns="45720" rIns="91440" bIns="45720" rtlCol="0"/>
-          <a:lstStyle>
-            <a:lvl1pPr algn="l">
-              <a:defRPr sz="1200"/>
-            </a:lvl1pPr>
-          </a:lstStyle>
-          <a:p>
-            <a:endParaRPr lang="en-US"/>
-          </a:p>
-        </p:txBody>
-      </p:sp>
-      <p:sp>
-        <p:nvSpPr>
-          <p:cNvPr id="3" name="Date Placeholder 2"/>
-          <p:cNvSpPr>
-            <a:spLocks noGrp="1"/>
-          </p:cNvSpPr>
-          <p:nvPr>
-            <p:ph type="dt" idx="1"/>
-          </p:nvPr>
-        </p:nvSpPr>
-        <p:spPr>
-          <a:xfrm>
-            <a:off x="3884613" y="0"/>
-            <a:ext cx="2971800" cy="458788"/>
-          </a:xfrm>
-          <a:prstGeom prst="rect">
-            <a:avLst/>
-          </a:prstGeom>
-        </p:spPr>
-        <p:txBody>
-          <a:bodyPr vert="horz" lIns="91440" tIns="45720" rIns="91440" bIns="45720" rtlCol="0"/>
-          <a:lstStyle>
-            <a:lvl1pPr algn="r">
-              <a:defRPr sz="1200"/>
-            </a:lvl1pPr>
-          </a:lstStyle>
-          <a:p>
-            <a:fld id="{5282F153-3F37-0F45-9E97-73ACFA13230C}" type="datetimeFigureOut">
-              <a:rPr lang="en-US"/>
-              <a:t>7/23/19</a:t>
-            </a:fld>
-            <a:endParaRPr lang="en-US"/>
-          </a:p>
-        </p:txBody>
-      </p:sp>
-      <p:sp>
-        <p:nvSpPr>
-          <p:cNvPr id="4" name="Slide Image Placeholder 3"/>
-          <p:cNvSpPr>
-            <a:spLocks noGrp="1" noRot="1" noChangeAspect="1"/>
-          </p:cNvSpPr>
-          <p:nvPr>
-            <p:ph type="sldImg" idx="2"/>
-          </p:nvPr>
-        </p:nvSpPr>
-        <p:spPr>
-          <a:xfrm>
-            <a:off x="685800" y="1143000"/>
-            <a:ext cx="5486400" cy="3086100"/>
-          </a:xfrm>
-          <a:prstGeom prst="rect">
-            <a:avLst/>
-          </a:prstGeom>
-          <a:noFill/>
-          <a:ln w="12700">
-            <a:solidFill>
-              <a:prstClr val="black"/>
-            </a:solidFill>
-          </a:ln>
-        </p:spPr>
-        <p:txBody>
-          <a:bodyPr vert="horz" lIns="91440" tIns="45720" rIns="91440" bIns="45720" rtlCol="0" anchor="ctr"/>
-          <a:lstStyle/>
-          <a:p>
-            <a:endParaRPr lang="en-US"/>
-          </a:p>
-        </p:txBody>
-      </p:sp>
-      <p:sp>
-        <p:nvSpPr>
-          <p:cNvPr id="5" name="Notes Placeholder 4"/>
-          <p:cNvSpPr>
-            <a:spLocks noGrp="1"/>
-          </p:cNvSpPr>
-          <p:nvPr>
-            <p:ph type="body" sz="quarter" idx="3"/>
-          </p:nvPr>
-        </p:nvSpPr>
-        <p:spPr>
-          <a:xfrm>
-            <a:off x="685800" y="4400550"/>
-            <a:ext cx="5486400" cy="3600450"/>
-          </a:xfrm>
-          <a:prstGeom prst="rect">
-            <a:avLst/>
-          </a:prstGeom>
-        </p:spPr>
-        <p:txBody>
-          <a:bodyPr vert="horz" lIns="91440" tIns="45720" rIns="91440" bIns="45720" rtlCol="0"/>
-          <a:lstStyle/>
-          <a:p>
-            <a:pPr lvl="0"/>
-            <a:r>
-              <a:rPr lang="en-US"/>
-              <a:t>Click to edit Master text styles</a:t>
-            </a:r>
-          </a:p>
-          <a:p>
-            <a:pPr lvl="1"/>
-            <a:r>
-              <a:rPr lang="en-US"/>
-              <a:t>Second level</a:t>
-            </a:r>
-          </a:p>
-          <a:p>
-            <a:pPr lvl="2"/>
-            <a:r>
-              <a:rPr lang="en-US"/>
-              <a:t>Third level</a:t>
-            </a:r>
-          </a:p>
-          <a:p>
-            <a:pPr lvl="3"/>
-            <a:r>
-              <a:rPr lang="en-US"/>
-              <a:t>Fourth level</a:t>
-            </a:r>
-          </a:p>
-          <a:p>
-            <a:pPr lvl="4"/>
-            <a:r>
-              <a:rPr lang="en-US"/>
-              <a:t>Fifth level</a:t>
-            </a:r>
-          </a:p>
-        </p:txBody>
-      </p:sp>
-      <p:sp>
-        <p:nvSpPr>
-          <p:cNvPr id="6" name="Footer Placeholder 5"/>
-          <p:cNvSpPr>
-            <a:spLocks noGrp="1"/>
-          </p:cNvSpPr>
-          <p:nvPr>
-            <p:ph type="ftr" sz="quarter" idx="4"/>
-          </p:nvPr>
-        </p:nvSpPr>
-        <p:spPr>
-          <a:xfrm>
-            <a:off x="0" y="8685213"/>
-            <a:ext cx="2971800" cy="458787"/>
-          </a:xfrm>
-          <a:prstGeom prst="rect">
-            <a:avLst/>
-          </a:prstGeom>
-        </p:spPr>
-        <p:txBody>
-          <a:bodyPr vert="horz" lIns="91440" tIns="45720" rIns="91440" bIns="45720" rtlCol="0" anchor="b"/>
-          <a:lstStyle>
-            <a:lvl1pPr algn="l">
-              <a:defRPr sz="1200"/>
-            </a:lvl1pPr>
-          </a:lstStyle>
-          <a:p>
-            <a:endParaRPr lang="en-US"/>
-          </a:p>
-        </p:txBody>
-      </p:sp>
-      <p:sp>
-        <p:nvSpPr>
-          <p:cNvPr id="7" name="Slide Number Placeholder 6"/>
-          <p:cNvSpPr>
-            <a:spLocks noGrp="1"/>
-          </p:cNvSpPr>
-          <p:nvPr>
-            <p:ph type="sldNum" sz="quarter" idx="5"/>
-          </p:nvPr>
-        </p:nvSpPr>
-        <p:spPr>
-          <a:xfrm>
-            <a:off x="3884613" y="8685213"/>
-            <a:ext cx="2971800" cy="458787"/>
-          </a:xfrm>
-          <a:prstGeom prst="rect">
-            <a:avLst/>
-          </a:prstGeom>
-        </p:spPr>
-        <p:txBody>
-          <a:bodyPr vert="horz" lIns="91440" tIns="45720" rIns="91440" bIns="45720" rtlCol="0" anchor="b"/>
-          <a:lstStyle>
-            <a:lvl1pPr algn="r">
-              <a:defRPr sz="1200"/>
-            </a:lvl1pPr>
-          </a:lstStyle>
-          <a:p>
-            <a:fld id="{CE5E9CC1-C706-0F49-92D6-E571CC5EEA8F}" type="slidenum">
-              <a:rPr lang="en-US"/>
-              <a:t>‹#›</a:t>
-            </a:fld>
-            <a:endParaRPr lang="en-US"/>
-          </a:p>
-        </p:txBody>
-      </p:sp>
     </p:spTree>
     <p:extLst>
       <p:ext uri="{BB962C8B-B14F-4D97-AF65-F5344CB8AC3E}">
-        <p14:creationId xmlns:p14="http://schemas.microsoft.com/office/powerpoint/2010/main" val="1024086991"/>
+        <p14:creationId xmlns:p14="http://schemas.microsoft.com/office/powerpoint/2010/main" val="2206673655"/>
       </p:ext>
     </p:extLst>
   </p:cSld>
@@ -508,9 +289,24 @@
           <a:p>
             <a:r>
               <a:rPr lang="en-US" dirty="0"/>
-              <a:t>[0:00] The finale. Open by naming the journey: “Twelve weeks ago we started with a question — why do you call me good? Today we finish where Jesus finishes: teaching others to OBEY. The whole course has been one sentence, and today it lands.” Warm, valedictory tone. Point at Matt 28:20: “teaching them to OBEY” — that is the obedience of faith in Jesus’ own words.</a:t>
-            </a:r>
-            <a:endParaRPr lang="en-US" dirty="0"/>
+              <a:t>[0:00] The finale. Open by naming the journey: “Twelve weeks ago we started with a question </a:t>
+            </a:r>
+            <a:r>
+              <a:rPr lang="en-US"/>
+              <a:t>→ </a:t>
+            </a:r>
+            <a:r>
+              <a:rPr lang="en-US" dirty="0"/>
+              <a:t>why do you call me good? Today we finish where Jesus finishes: teaching others to OBEY. The whole course has been one sentence, and today it lands.” Warm, valedictory tone. Point at Matt 28:20: “teaching them to OBEY” </a:t>
+            </a:r>
+            <a:r>
+              <a:rPr lang="en-US"/>
+              <a:t>→</a:t>
+            </a:r>
+            <a:r>
+              <a:rPr lang="en-US" dirty="0"/>
+              <a:t> that is the obedience of faith in Jesus’ own words.</a:t>
+            </a:r>
           </a:p>
         </p:txBody>
       </p:sp>
@@ -597,12 +393,51 @@
             <a:r>
               <a:rPr lang="en-US" dirty="0"/>
               <a:t>[0:00–12:00]
-[CLICK] Deut 6 — the home is the first classroom. “On the heart FIRST” ties back to Week 5: you can only hand on what you’ve received and hold. The daily-life setting (sit, walk, lie down, rise) = ordinary time, not just formal devotions.
-[CLICK] Abraham &amp; Joshua — the household as a unit of covenant faithfulness across generations.
-[CLICK] EVERYONE HAS A POST — crucial for a mixed class; this is not a “dads” lecture. Husbands/wives, fathers/mothers, grandparents/singles. Read Lois &amp; Eunice warmly — faith came down through two women. Every person in the room disciples someone.
-[CLICK] 1 Pet 3:7 — the striking wiring: home life affects prayer life. The household is worship’s proving ground (Week 9’s living sacrifice, offered first at home). Transition: “And the pattern in the home is the same one we’ve seen all course.”</a:t>
-            </a:r>
-            <a:endParaRPr lang="en-US" dirty="0"/>
+[CLICK] Deut 6 </a:t>
+            </a:r>
+            <a:r>
+              <a:rPr lang="en-US"/>
+              <a:t>→ </a:t>
+            </a:r>
+            <a:r>
+              <a:rPr lang="en-US" dirty="0"/>
+              <a:t>the home is the first classroom. “On the heart FIRST” ties back to Week 5: you can only hand on what you’ve received and hold. The daily-life setting (sit, walk, lie down, rise) = ordinary time, not just formal devotions.
+[CLICK] Abraham &amp; Joshua </a:t>
+            </a:r>
+            <a:r>
+              <a:rPr lang="en-US"/>
+              <a:t>→ </a:t>
+            </a:r>
+            <a:r>
+              <a:rPr lang="en-US" dirty="0"/>
+              <a:t>the household as a unit of covenant faithfulness across generations.
+[CLICK] EVERYONE HAS A POST </a:t>
+            </a:r>
+            <a:r>
+              <a:rPr lang="en-US"/>
+              <a:t>→ </a:t>
+            </a:r>
+            <a:r>
+              <a:rPr lang="en-US" dirty="0"/>
+              <a:t>crucial for a mixed class; this is not a “dads” lecture. Husbands/wives, fathers/mothers, grandparents/singles. Read Lois &amp; Eunice warmly </a:t>
+            </a:r>
+            <a:r>
+              <a:rPr lang="en-US"/>
+              <a:t>→ </a:t>
+            </a:r>
+            <a:r>
+              <a:rPr lang="en-US" dirty="0"/>
+              <a:t>faith came down through two women. Every person in the room disciples someone.
+[CLICK] 1 Pet 3:7 </a:t>
+            </a:r>
+            <a:r>
+              <a:rPr lang="en-US"/>
+              <a:t>→</a:t>
+            </a:r>
+            <a:r>
+              <a:rPr lang="en-US" dirty="0"/>
+              <a:t> the striking wiring: home life affects prayer life. The household is worship’s proving ground (Week 9’s living sacrifice, offered first at home). Transition: “And the pattern in the home is the same one we’ve seen all course.”</a:t>
+            </a:r>
           </a:p>
         </p:txBody>
       </p:sp>
@@ -689,12 +524,43 @@
             <a:r>
               <a:rPr lang="en-US" dirty="0"/>
               <a:t>[12:00–24:00]
-[CLICK] The course in one motion — receive and hand on. This is the through-line from Week 10 (apostolic deposit) now applied to the home. Parents don’t invent the faith any more than apostles did.
-[CLICK] 2 Tim 2:2 — the relay, and note it runs through Timothy’s HOME (Lois/Eunice) as well as through Paul. Pulpits and kitchens both.
-[CLICK] The blemished lamb comes HOME — Week 9’s image, now aimed at family time. Deliver gently, first-person; the people under our roof get our most tired leftovers most easily. Firstfruits of attention, not leftovers.
-[CLICK] The ordinary shape — no platform required. Everyone is a link in a relay stretching back to the apostles and forward past death. Dignify the small, faithful handoff. Transition: “And this is exactly where Jesus ends His time on earth.”</a:t>
-            </a:r>
-            <a:endParaRPr lang="en-US" dirty="0"/>
+[CLICK] The course in one motion </a:t>
+            </a:r>
+            <a:r>
+              <a:rPr lang="en-US"/>
+              <a:t>→ </a:t>
+            </a:r>
+            <a:r>
+              <a:rPr lang="en-US" dirty="0"/>
+              <a:t>receive and hand on. This is the through-line from Week 10 (apostolic deposit) now applied to the home. Parents don’t invent the faith any more than apostles did.
+[CLICK] 2 Tim 2:2 </a:t>
+            </a:r>
+            <a:r>
+              <a:rPr lang="en-US"/>
+              <a:t>→ </a:t>
+            </a:r>
+            <a:r>
+              <a:rPr lang="en-US" dirty="0"/>
+              <a:t>the relay, and note it runs through Timothy’s HOME (Lois/Eunice) as well as through Paul. Pulpits and kitchens both.
+[CLICK] The blemished lamb comes HOME </a:t>
+            </a:r>
+            <a:r>
+              <a:rPr lang="en-US"/>
+              <a:t>→ </a:t>
+            </a:r>
+            <a:r>
+              <a:rPr lang="en-US" dirty="0"/>
+              <a:t>Week 9’s image, now aimed at family time. Deliver gently, first-person; the people under our roof get our most tired leftovers most easily. Firstfruits of attention, not leftovers.
+[CLICK] The ordinary shape </a:t>
+            </a:r>
+            <a:r>
+              <a:rPr lang="en-US"/>
+              <a:t>→</a:t>
+            </a:r>
+            <a:r>
+              <a:rPr lang="en-US" dirty="0"/>
+              <a:t> no platform required. Everyone is a link in a relay stretching back to the apostles and forward past death. Dignify the small, faithful handoff. Transition: “And this is exactly where Jesus ends His time on earth.”</a:t>
+            </a:r>
           </a:p>
         </p:txBody>
       </p:sp>
@@ -781,12 +647,51 @@
             <a:r>
               <a:rPr lang="en-US" dirty="0"/>
               <a:t>[24:00–36:00]
-[CLICK] Read Matt 28:18–20, hitting the bold verbs. Land hard on “OBEY” (red) — this is THE payoff: the course’s title phrase is in Jesus’ final command.
-[CLICK] Make the connection explicit — “teaching them to obey” = the obedience of faith. Discipleship aims past agreement to obedience.
-[CLICK] The Heb 5:12 resolution — the FULL arc. Week 1 it stung (you should be teachers and aren’t); today it commissions (you’ve been fed the meat; now serve it). This is the emotional peak of the finale — let it land.
-[CLICK] The grace bookends — “all authority is MINE” + “I am WITH you.” The commission is framed by His power and presence. We’re sent, not abandoned. Transition: “And all of it rests on something already finished.”</a:t>
-            </a:r>
-            <a:endParaRPr lang="en-US" dirty="0"/>
+[CLICK] Read Matt 28:18–20, hitting the bold verbs. Land hard on “OBEY” (red) </a:t>
+            </a:r>
+            <a:r>
+              <a:rPr lang="en-US"/>
+              <a:t>→ </a:t>
+            </a:r>
+            <a:r>
+              <a:rPr lang="en-US" dirty="0"/>
+              <a:t>this is THE payoff: the course’s title phrase is in Jesus’ final command.
+[CLICK] Make the connection explicit </a:t>
+            </a:r>
+            <a:r>
+              <a:rPr lang="en-US"/>
+              <a:t>→ </a:t>
+            </a:r>
+            <a:r>
+              <a:rPr lang="en-US" dirty="0"/>
+              <a:t>“teaching them to obey” = the obedience of faith. Discipleship aims past agreement to obedience.
+[CLICK] The Heb 5:12 resolution </a:t>
+            </a:r>
+            <a:r>
+              <a:rPr lang="en-US"/>
+              <a:t>→ </a:t>
+            </a:r>
+            <a:r>
+              <a:rPr lang="en-US" dirty="0"/>
+              <a:t>the FULL arc. Week 1 it stung (you should be teachers and aren’t); today it commissions (you’ve been fed the meat; now serve it). This is the emotional peak of the finale </a:t>
+            </a:r>
+            <a:r>
+              <a:rPr lang="en-US"/>
+              <a:t>→ </a:t>
+            </a:r>
+            <a:r>
+              <a:rPr lang="en-US" dirty="0"/>
+              <a:t>let it land.
+[CLICK] The grace bookends </a:t>
+            </a:r>
+            <a:r>
+              <a:rPr lang="en-US"/>
+              <a:t>→</a:t>
+            </a:r>
+            <a:r>
+              <a:rPr lang="en-US" dirty="0"/>
+              <a:t> “all authority is MINE” + “I am WITH you.” The commission is framed by His power and presence. We’re sent, not abandoned. Transition: “And all of it rests on something already finished.”</a:t>
+            </a:r>
           </a:p>
         </p:txBody>
       </p:sp>
@@ -873,11 +778,50 @@
             <a:r>
               <a:rPr lang="en-US" dirty="0"/>
               <a:t>[36:00–43:00]
-[CLICK] Heb 10:5,7,10 — Psalm 40 in Christ’s mouth. The finale returns to where Week 9 ended.
-[CLICK×4] Build the gold stack bottom-up — the SAME four layers from Week 2, now shown FILLED and PERFECT in Christ. This visual callback signals the course coming full circle. Religion/worship/sacrifice/obedience — all aligned once, in Him.
-[CLICK] The right column — the grace guardrail one final time. He completed the stack FIRST. Everything asked in 12 weeks (tests, sacrifice, order, commission) rests on His finished work. Mercy first, altar second — say it one last time; it has been the spine of the whole course. Transition: to discussion, then the charge.</a:t>
-            </a:r>
-            <a:endParaRPr lang="en-US" dirty="0"/>
+[CLICK] Heb 10:5,7,10 </a:t>
+            </a:r>
+            <a:r>
+              <a:rPr lang="en-US"/>
+              <a:t>→ </a:t>
+            </a:r>
+            <a:r>
+              <a:rPr lang="en-US" dirty="0"/>
+              <a:t>Psalm 40 in Christ’s mouth. The finale returns to where Week 9 ended.
+[CLICK×4] Build the gold stack bottom-up </a:t>
+            </a:r>
+            <a:r>
+              <a:rPr lang="en-US"/>
+              <a:t>→ </a:t>
+            </a:r>
+            <a:r>
+              <a:rPr lang="en-US" dirty="0"/>
+              <a:t>the SAME four layers from Week 2, now shown FILLED and PERFECT in Christ. This visual callback signals the course coming full circle. Religion/worship/sacrifice/obedience </a:t>
+            </a:r>
+            <a:r>
+              <a:rPr lang="en-US"/>
+              <a:t>→ </a:t>
+            </a:r>
+            <a:r>
+              <a:rPr lang="en-US" dirty="0"/>
+              <a:t>all aligned once, in Him.
+[CLICK] The right column </a:t>
+            </a:r>
+            <a:r>
+              <a:rPr lang="en-US"/>
+              <a:t>→ </a:t>
+            </a:r>
+            <a:r>
+              <a:rPr lang="en-US" dirty="0"/>
+              <a:t>the grace guardrail one final time. He completed the stack FIRST. Everything asked in 12 weeks (tests, sacrifice, order, commission) rests on His finished work. Mercy first, altar second </a:t>
+            </a:r>
+            <a:r>
+              <a:rPr lang="en-US"/>
+              <a:t>→</a:t>
+            </a:r>
+            <a:r>
+              <a:rPr lang="en-US" dirty="0"/>
+              <a:t> say it one last time; it has been the spine of the whole course. Transition: to discussion, then the charge.</a:t>
+            </a:r>
           </a:p>
         </p:txBody>
       </p:sp>
@@ -964,12 +908,43 @@
             <a:r>
               <a:rPr lang="en-US" dirty="0"/>
               <a:t>[45:00–55:00]
-The most warm-hearted discussion of the course — let it breathe.
-Q1: Gratitude. Someone paid to hand you this faith — a parent, a teacher, a friend, a grandmother. Naming them and the COST makes the relay concrete and moves people. Expect some emotion; that’s right. A few names aloud is a fitting near-end to 12 weeks.
-Q2: Resolve, and CONCRETE. Push past “I’ll be a better witness” to ONE person and ONE step this month — a conversation, a Bible opened with a child, an invitation, a text sent. The course fails if it ends in agreement and no action; it succeeds if each person leaves with a name and a next step.
-No click needed to change slides — or click x3 to reinforce the tone.</a:t>
-            </a:r>
-            <a:endParaRPr lang="en-US" dirty="0"/>
+The most warm-hearted discussion of the course </a:t>
+            </a:r>
+            <a:r>
+              <a:rPr lang="en-US"/>
+              <a:t>→ </a:t>
+            </a:r>
+            <a:r>
+              <a:rPr lang="en-US" dirty="0"/>
+              <a:t>let it breathe.
+Q1: Gratitude. Someone paid to hand you this faith </a:t>
+            </a:r>
+            <a:r>
+              <a:rPr lang="en-US"/>
+              <a:t>→ </a:t>
+            </a:r>
+            <a:r>
+              <a:rPr lang="en-US" dirty="0"/>
+              <a:t>a parent, a teacher, a friend, a grandmother. Naming them and the COST makes the relay concrete and moves people. Expect some emotion; that’s right. A few names aloud is a fitting near-end to 12 weeks.
+Q2: Resolve, and CONCRETE. Push past “I’ll be a better witness” to ONE person and ONE step this month </a:t>
+            </a:r>
+            <a:r>
+              <a:rPr lang="en-US"/>
+              <a:t>→ </a:t>
+            </a:r>
+            <a:r>
+              <a:rPr lang="en-US" dirty="0"/>
+              <a:t>a conversation, a Bible opened with a child, an invitation, a text sent. The course fails if it ends in agreement and no action; it succeeds if each person leaves with a name and a next step.
+No click needed to change slides </a:t>
+            </a:r>
+            <a:r>
+              <a:rPr lang="en-US"/>
+              <a:t>→</a:t>
+            </a:r>
+            <a:r>
+              <a:rPr lang="en-US" dirty="0"/>
+              <a:t> or click x3 to reinforce the tone.</a:t>
+            </a:r>
           </a:p>
         </p:txBody>
       </p:sp>
@@ -1055,13 +1030,52 @@
           <a:p>
             <a:r>
               <a:rPr lang="en-US" dirty="0"/>
-              <a:t>[55:00 close, the final ~2 min — unhurried, valedictory]
-[CLICK] The standing assignment — it doesn’t stop with the course. One chapter, before the phone, eager and examining. The habit is the point.
-[CLICK] The whole course in one breath — read it slowly; let them feel the arc they’ve traveled. Twelve weeks, one thread.
-[CLICK] From question to commission — the bookend. “Why do you call me good?” → “teaching them to obey.”
-[CLICK] The final banner — the course’s last word and its title made imperative. Say it, then a moment of silence, then close in prayer if that fits your setting. Thank them for twelve weeks. Do not rush the ending; let it land.</a:t>
-            </a:r>
-            <a:endParaRPr lang="en-US" dirty="0"/>
+              <a:t>[55:00 close, the final ~2 min </a:t>
+            </a:r>
+            <a:r>
+              <a:rPr lang="en-US"/>
+              <a:t>→ </a:t>
+            </a:r>
+            <a:r>
+              <a:rPr lang="en-US" dirty="0"/>
+              <a:t>unhurried, valedictory]
+[CLICK] The standing assignment </a:t>
+            </a:r>
+            <a:r>
+              <a:rPr lang="en-US"/>
+              <a:t>→ </a:t>
+            </a:r>
+            <a:r>
+              <a:rPr lang="en-US" dirty="0"/>
+              <a:t>it doesn’t stop with the course. One chapter, before the phone, eager and examining. The habit is the point.
+[CLICK] The whole course in one breath </a:t>
+            </a:r>
+            <a:r>
+              <a:rPr lang="en-US"/>
+              <a:t>→ </a:t>
+            </a:r>
+            <a:r>
+              <a:rPr lang="en-US" dirty="0"/>
+              <a:t>read it slowly; let them feel the arc they’ve traveled. Twelve weeks, one thread.
+[CLICK] From question to commission </a:t>
+            </a:r>
+            <a:r>
+              <a:rPr lang="en-US"/>
+              <a:t>→ </a:t>
+            </a:r>
+            <a:r>
+              <a:rPr lang="en-US" dirty="0"/>
+              <a:t>the bookend. “Why do you call me good?” → “teaching them to obey.”
+[CLICK] The final banner </a:t>
+            </a:r>
+            <a:r>
+              <a:rPr lang="en-US"/>
+              <a:t>→</a:t>
+            </a:r>
+            <a:r>
+              <a:rPr lang="en-US" dirty="0"/>
+              <a:t> the course’s last word and its title made imperative. Say it, then a moment of silence, then close in prayer if that fits your setting. Thank them for twelve weeks. Do not rush the ending; let it land.</a:t>
+            </a:r>
           </a:p>
         </p:txBody>
       </p:sp>
@@ -1134,6 +1148,11 @@
 <file path=ppt/slideMasters/slideMaster1.xml><?xml version="1.0" encoding="utf-8"?>
 <p:sldMaster xmlns:a="http://schemas.openxmlformats.org/drawingml/2006/main" xmlns:r="http://schemas.openxmlformats.org/officeDocument/2006/relationships" xmlns:p="http://schemas.openxmlformats.org/presentationml/2006/main">
   <p:cSld>
+    <p:bg>
+      <p:bgRef idx="1001">
+        <a:schemeClr val="bg1"/>
+      </p:bgRef>
+    </p:bg>
     <p:spTree>
       <p:nvGrpSpPr>
         <p:cNvPr id="1" name=""/>
@@ -1446,7 +1465,7 @@
           <a:bodyPr wrap="square" lIns="0" tIns="0" rIns="0" bIns="0" rtlCol="0" anchor="t"/>
           <a:lstStyle/>
           <a:p>
-            <a:pPr algn="ctr" indent="0" marL="0">
+            <a:pPr marL="0" indent="0" algn="ctr">
               <a:buNone/>
             </a:pPr>
             <a:r>
@@ -1458,7 +1477,7 @@
                 <a:ea typeface="Arial" pitchFamily="34" charset="-122"/>
                 <a:cs typeface="Arial" pitchFamily="34" charset="-120"/>
               </a:rPr>
-              <a:t>The Obedience of Faith — Week 12  ·  Unit V: Commission  ·  Finale</a:t>
+              <a:t>The Obedience of Faith - Week 12  ·  Unit V: Commission  ·  Finale</a:t>
             </a:r>
             <a:endParaRPr lang="en-US" sz="1600" dirty="0"/>
           </a:p>
@@ -1485,7 +1504,7 @@
           <a:bodyPr wrap="square" lIns="0" tIns="0" rIns="0" bIns="0" rtlCol="0" anchor="t"/>
           <a:lstStyle/>
           <a:p>
-            <a:pPr algn="ctr" indent="0" marL="0">
+            <a:pPr marL="0" indent="0" algn="ctr">
               <a:buNone/>
             </a:pPr>
             <a:r>
@@ -1524,7 +1543,7 @@
           <a:bodyPr wrap="square" lIns="0" tIns="0" rIns="0" bIns="0" rtlCol="0" anchor="t"/>
           <a:lstStyle/>
           <a:p>
-            <a:pPr algn="ctr" indent="0" marL="0">
+            <a:pPr marL="0" indent="0" algn="ctr">
               <a:buNone/>
             </a:pPr>
             <a:r>
@@ -1536,7 +1555,30 @@
                 <a:ea typeface="Arial" pitchFamily="34" charset="-122"/>
                 <a:cs typeface="Arial" pitchFamily="34" charset="-120"/>
               </a:rPr>
-              <a:t>The Obedience of Faith — Completed</a:t>
+              <a:t>The Obedience of Faith </a:t>
+            </a:r>
+            <a:r>
+              <a:rPr lang="en-US" sz="2100" b="1" i="1" dirty="0">
+                <a:solidFill>
+                  <a:srgbClr val="1F497D"/>
+                </a:solidFill>
+                <a:latin typeface="Arial" pitchFamily="34" charset="0"/>
+                <a:ea typeface="Arial" pitchFamily="34" charset="-122"/>
+                <a:cs typeface="Arial" pitchFamily="34" charset="-120"/>
+                <a:sym typeface="Wingdings" pitchFamily="2" charset="2"/>
+              </a:rPr>
+              <a:t></a:t>
+            </a:r>
+            <a:r>
+              <a:rPr lang="en-US" sz="2100" b="1" i="1" dirty="0">
+                <a:solidFill>
+                  <a:srgbClr val="1F497D"/>
+                </a:solidFill>
+                <a:latin typeface="Arial" pitchFamily="34" charset="0"/>
+                <a:ea typeface="Arial" pitchFamily="34" charset="-122"/>
+                <a:cs typeface="Arial" pitchFamily="34" charset="-120"/>
+              </a:rPr>
+              <a:t> Completed</a:t>
             </a:r>
             <a:endParaRPr lang="en-US" sz="1600" dirty="0"/>
           </a:p>
@@ -1563,11 +1605,11 @@
           <a:bodyPr wrap="square" lIns="0" tIns="0" rIns="0" bIns="0" rtlCol="0" anchor="t"/>
           <a:lstStyle/>
           <a:p>
-            <a:pPr algn="ctr" indent="0" marL="0">
+            <a:pPr marL="0" indent="0" algn="ctr">
               <a:buNone/>
             </a:pPr>
             <a:r>
-              <a:rPr lang="en-US" sz="2100" i="1" dirty="0">
+              <a:rPr lang="en-US" sz="2400" i="1" dirty="0">
                 <a:solidFill>
                   <a:srgbClr val="000000"/>
                 </a:solidFill>
@@ -1577,17 +1619,14 @@
               </a:rPr>
               <a:t>“teaching them to obey everything I have commanded you. And remember, I am with you always, to the end of the age.”</a:t>
             </a:r>
-            <a:pPr algn="ctr" indent="0" marL="0">
+            <a:endParaRPr lang="en-US" dirty="0"/>
+          </a:p>
+          <a:p>
+            <a:pPr marL="0" indent="0" algn="ctr">
               <a:buNone/>
             </a:pPr>
-            <a:endParaRPr lang="en-US" sz="1600" dirty="0"/>
-          </a:p>
-          <a:p>
-            <a:pPr algn="ctr" indent="0" marL="0">
-              <a:buNone/>
-            </a:pPr>
-            <a:r>
-              <a:rPr lang="en-US" sz="1800" dirty="0">
+            <a:r>
+              <a:rPr lang="en-US" sz="2000" dirty="0">
                 <a:solidFill>
                   <a:srgbClr val="000000"/>
                 </a:solidFill>
@@ -1597,7 +1636,7 @@
               </a:rPr>
               <a:t>(Matthew 28:20)</a:t>
             </a:r>
-            <a:endParaRPr lang="en-US" sz="1600" dirty="0"/>
+            <a:endParaRPr lang="en-US" dirty="0"/>
           </a:p>
         </p:txBody>
       </p:sp>
@@ -1609,8 +1648,8 @@
         </p:nvSpPr>
         <p:spPr>
           <a:xfrm>
-            <a:off x="914400" y="4754880"/>
-            <a:ext cx="7315200" cy="457200"/>
+            <a:off x="914400" y="4956243"/>
+            <a:ext cx="7315200" cy="411480"/>
           </a:xfrm>
           <a:prstGeom prst="rect">
             <a:avLst/>
@@ -1622,18 +1661,18 @@
           <a:bodyPr wrap="square" lIns="0" tIns="0" rIns="0" bIns="0" rtlCol="0" anchor="t"/>
           <a:lstStyle/>
           <a:p>
-            <a:pPr algn="ctr" indent="0" marL="0">
+            <a:pPr marL="0" indent="0" algn="ctr">
               <a:buNone/>
             </a:pPr>
             <a:r>
-              <a:rPr lang="en-US" sz="1600" b="1" u="sng" dirty="0">
+              <a:rPr lang="en-US" sz="2000" b="1" u="sng" dirty="0">
                 <a:solidFill>
                   <a:srgbClr val="4F81BD"/>
                 </a:solidFill>
                 <a:latin typeface="Arial" pitchFamily="34" charset="0"/>
                 <a:ea typeface="Arial" pitchFamily="34" charset="-122"/>
                 <a:cs typeface="Arial" pitchFamily="34" charset="-120"/>
-                <a:hlinkClick r:id="rId1" invalidUrl="" action="" tgtFrame="" tooltip="" history="1" highlightClick="0" endSnd="0">
+                <a:hlinkClick r:id="rId3">
                   <a:extLst>
                     <a:ext uri="{A12FA001-AC4F-418D-AE19-62706E023703}">
                       <ahyp:hlinkClr xmlns:ahyp="http://schemas.microsoft.com/office/drawing/2018/hyperlinkcolor" val="tx"/>
@@ -1641,9 +1680,38 @@
                   </a:extLst>
                 </a:hlinkClick>
               </a:rPr>
-              <a:t>https://tinyurl.com/TeachTheWord</a:t>
-            </a:r>
-            <a:endParaRPr lang="en-US" sz="1600" dirty="0"/>
+              <a:t>https://</a:t>
+            </a:r>
+            <a:r>
+              <a:rPr lang="en-US" sz="2000" b="1" u="sng" dirty="0" err="1">
+                <a:solidFill>
+                  <a:srgbClr val="4F81BD"/>
+                </a:solidFill>
+                <a:latin typeface="Arial" pitchFamily="34" charset="0"/>
+                <a:ea typeface="Arial" pitchFamily="34" charset="-122"/>
+                <a:cs typeface="Arial" pitchFamily="34" charset="-120"/>
+                <a:hlinkClick r:id="rId3">
+                  <a:extLst>
+                    <a:ext uri="{A12FA001-AC4F-418D-AE19-62706E023703}">
+                      <ahyp:hlinkClr xmlns:ahyp="http://schemas.microsoft.com/office/drawing/2018/hyperlinkcolor" val="tx"/>
+                    </a:ext>
+                  </a:extLst>
+                </a:hlinkClick>
+              </a:rPr>
+              <a:t>TeachTheWord</a:t>
+            </a:r>
+            <a:r>
+              <a:rPr lang="en-US" sz="2000" b="1" u="sng" dirty="0" err="1">
+                <a:solidFill>
+                  <a:srgbClr val="4F81BD"/>
+                </a:solidFill>
+                <a:latin typeface="Arial" pitchFamily="34" charset="0"/>
+                <a:ea typeface="Arial" pitchFamily="34" charset="-122"/>
+                <a:cs typeface="Arial" pitchFamily="34" charset="-120"/>
+              </a:rPr>
+              <a:t>.Church</a:t>
+            </a:r>
+            <a:endParaRPr lang="en-US" sz="2000" dirty="0"/>
           </a:p>
         </p:txBody>
       </p:sp>
@@ -1693,7 +1761,7 @@
           <a:bodyPr wrap="square" lIns="0" tIns="0" rIns="0" bIns="0" rtlCol="0" anchor="t"/>
           <a:lstStyle/>
           <a:p>
-            <a:pPr algn="l" indent="0" marL="0">
+            <a:pPr marL="0" indent="0" algn="l">
               <a:buNone/>
             </a:pPr>
             <a:r>
@@ -1719,7 +1787,7 @@
         </p:nvSpPr>
         <p:spPr>
           <a:xfrm>
-            <a:off x="228600" y="566928"/>
+            <a:off x="228600" y="489204"/>
             <a:ext cx="8686800" cy="320040"/>
           </a:xfrm>
           <a:prstGeom prst="rect">
@@ -1732,11 +1800,11 @@
           <a:bodyPr wrap="square" lIns="0" tIns="0" rIns="0" bIns="0" rtlCol="0" anchor="t"/>
           <a:lstStyle/>
           <a:p>
-            <a:pPr algn="l" indent="0" marL="0">
+            <a:pPr marL="0" indent="0" algn="l">
               <a:buNone/>
             </a:pPr>
             <a:r>
-              <a:rPr lang="en-US" sz="1300" b="1" dirty="0">
+              <a:rPr lang="en-US" sz="2000" b="1" dirty="0">
                 <a:solidFill>
                   <a:srgbClr val="4F81BD"/>
                 </a:solidFill>
@@ -1744,9 +1812,9 @@
                 <a:ea typeface="Arial" pitchFamily="34" charset="-122"/>
                 <a:cs typeface="Arial" pitchFamily="34" charset="-120"/>
               </a:rPr>
-              <a:t>God’s order reaches into the home — and everyone has a post</a:t>
-            </a:r>
-            <a:endParaRPr lang="en-US" sz="1600" dirty="0"/>
+              <a:t>God’s order reaches into the home → and everyone has a post</a:t>
+            </a:r>
+            <a:endParaRPr lang="en-US" sz="2800" dirty="0"/>
           </a:p>
         </p:txBody>
       </p:sp>
@@ -1758,7 +1826,7 @@
         </p:nvSpPr>
         <p:spPr>
           <a:xfrm>
-            <a:off x="365760" y="1005840"/>
+            <a:off x="365760" y="944942"/>
             <a:ext cx="8412480" cy="1234440"/>
           </a:xfrm>
           <a:prstGeom prst="rect">
@@ -1771,11 +1839,11 @@
           <a:bodyPr wrap="square" lIns="0" tIns="0" rIns="0" bIns="0" rtlCol="0" anchor="t"/>
           <a:lstStyle/>
           <a:p>
-            <a:pPr algn="l" indent="0" marL="0">
+            <a:pPr marL="0" indent="0" algn="l">
               <a:buNone/>
             </a:pPr>
             <a:r>
-              <a:rPr lang="en-US" sz="1400" b="1" dirty="0">
+              <a:rPr lang="en-US" sz="1600" b="1" dirty="0">
                 <a:solidFill>
                   <a:srgbClr val="1F497D"/>
                 </a:solidFill>
@@ -1786,11 +1854,36 @@
               <a:t>Before the assembly, the home. The faith is handed down at the kitchen table:
 </a:t>
             </a:r>
-            <a:pPr algn="l" indent="0" marL="0">
+            <a:r>
+              <a:rPr lang="en-US" sz="1600" b="1" i="1" dirty="0">
+                <a:solidFill>
+                  <a:srgbClr val="000000"/>
+                </a:solidFill>
+                <a:latin typeface="Arial" pitchFamily="34" charset="0"/>
+                <a:ea typeface="Arial" pitchFamily="34" charset="-122"/>
+                <a:cs typeface="Arial" pitchFamily="34" charset="-120"/>
+              </a:rPr>
+              <a:t>“These words… must be kept on your heart. Teach them to your children and speak of them… when you sit at home, when you walk along the road, when you lie down, and when you get up.” </a:t>
+            </a:r>
+            <a:r>
+              <a:rPr lang="en-US" sz="1400" b="1" dirty="0">
+                <a:solidFill>
+                  <a:srgbClr val="000000"/>
+                </a:solidFill>
+                <a:latin typeface="Arial" pitchFamily="34" charset="0"/>
+                <a:ea typeface="Arial" pitchFamily="34" charset="-122"/>
+                <a:cs typeface="Arial" pitchFamily="34" charset="-120"/>
+              </a:rPr>
+              <a:t>(Deut 6:6–7)</a:t>
+            </a:r>
+            <a:endParaRPr lang="en-US" dirty="0"/>
+          </a:p>
+          <a:p>
+            <a:pPr marL="0" indent="0" algn="l">
               <a:buNone/>
             </a:pPr>
             <a:r>
-              <a:rPr lang="en-US" sz="1400" b="1" i="1" dirty="0">
+              <a:rPr lang="en-US" sz="1600" i="1" dirty="0">
                 <a:solidFill>
                   <a:srgbClr val="000000"/>
                 </a:solidFill>
@@ -1798,43 +1891,9 @@
                 <a:ea typeface="Arial" pitchFamily="34" charset="-122"/>
                 <a:cs typeface="Arial" pitchFamily="34" charset="-120"/>
               </a:rPr>
-              <a:t>“These words… must be kept on your heart. Teach them to your children and speak of them… when you sit at home, when you walk along the road, when you lie down, and when you get up.” </a:t>
-            </a:r>
-            <a:pPr algn="l" indent="0" marL="0">
-              <a:buNone/>
-            </a:pPr>
-            <a:r>
-              <a:rPr lang="en-US" sz="1300" b="1" dirty="0">
-                <a:solidFill>
-                  <a:srgbClr val="000000"/>
-                </a:solidFill>
-                <a:latin typeface="Arial" pitchFamily="34" charset="0"/>
-                <a:ea typeface="Arial" pitchFamily="34" charset="-122"/>
-                <a:cs typeface="Arial" pitchFamily="34" charset="-120"/>
-              </a:rPr>
-              <a:t>(Deut 6:6–7)</a:t>
-            </a:r>
-            <a:pPr algn="l" indent="0" marL="0">
-              <a:buNone/>
-            </a:pPr>
-            <a:endParaRPr lang="en-US" sz="1600" dirty="0"/>
-          </a:p>
-          <a:p>
-            <a:pPr algn="l" indent="0" marL="0">
-              <a:buNone/>
-            </a:pPr>
-            <a:r>
-              <a:rPr lang="en-US" sz="1300" i="1" dirty="0">
-                <a:solidFill>
-                  <a:srgbClr val="000000"/>
-                </a:solidFill>
-                <a:latin typeface="Arial" pitchFamily="34" charset="0"/>
-                <a:ea typeface="Arial" pitchFamily="34" charset="-122"/>
-                <a:cs typeface="Arial" pitchFamily="34" charset="-120"/>
-              </a:rPr>
-              <a:t>On the heart FIRST — then on the lips. You cannot hand down what you do not hold.</a:t>
-            </a:r>
-            <a:endParaRPr lang="en-US" sz="1600" dirty="0"/>
+              <a:t>On the heart FIRST → then on the lips. You cannot hand down what you do not hold.</a:t>
+            </a:r>
+            <a:endParaRPr lang="en-US" sz="2000" dirty="0"/>
           </a:p>
         </p:txBody>
       </p:sp>
@@ -1846,7 +1905,7 @@
         </p:nvSpPr>
         <p:spPr>
           <a:xfrm>
-            <a:off x="365760" y="2423160"/>
+            <a:off x="365760" y="2318844"/>
             <a:ext cx="8412480" cy="822960"/>
           </a:xfrm>
           <a:prstGeom prst="rect">
@@ -1859,11 +1918,11 @@
           <a:bodyPr wrap="square" lIns="0" tIns="0" rIns="0" bIns="0" rtlCol="0" anchor="t"/>
           <a:lstStyle/>
           <a:p>
-            <a:pPr algn="l" indent="0" marL="0">
+            <a:pPr marL="0" indent="0" algn="l">
               <a:buNone/>
             </a:pPr>
             <a:r>
-              <a:rPr lang="en-US" sz="1400" b="1" dirty="0">
+              <a:rPr lang="en-US" b="1" dirty="0">
                 <a:solidFill>
                   <a:srgbClr val="1F497D"/>
                 </a:solidFill>
@@ -1873,11 +1932,8 @@
               </a:rPr>
               <a:t>It is why Abraham was chosen: </a:t>
             </a:r>
-            <a:pPr algn="l" indent="0" marL="0">
-              <a:buNone/>
-            </a:pPr>
-            <a:r>
-              <a:rPr lang="en-US" sz="1400" b="1" i="1" dirty="0">
+            <a:r>
+              <a:rPr lang="en-US" b="1" i="1" dirty="0">
                 <a:solidFill>
                   <a:srgbClr val="000000"/>
                 </a:solidFill>
@@ -1887,11 +1943,8 @@
               </a:rPr>
               <a:t>“so that he may command his children and his household after him to keep the way of the LORD” </a:t>
             </a:r>
-            <a:pPr algn="l" indent="0" marL="0">
-              <a:buNone/>
-            </a:pPr>
-            <a:r>
-              <a:rPr lang="en-US" sz="1300" b="1" dirty="0">
+            <a:r>
+              <a:rPr lang="en-US" sz="1600" b="1" dirty="0">
                 <a:solidFill>
                   <a:srgbClr val="000000"/>
                 </a:solidFill>
@@ -1901,11 +1954,8 @@
               </a:rPr>
               <a:t>(Gen 18:19)</a:t>
             </a:r>
-            <a:pPr algn="l" indent="0" marL="0">
-              <a:buNone/>
-            </a:pPr>
-            <a:r>
-              <a:rPr lang="en-US" sz="1250" dirty="0">
+            <a:r>
+              <a:rPr lang="en-US" sz="1600" dirty="0">
                 <a:solidFill>
                   <a:srgbClr val="000000"/>
                 </a:solidFill>
@@ -1915,7 +1965,7 @@
               </a:rPr>
               <a:t>  And Joshua: “as for me and my household, we will serve the LORD” (Josh 24:15).</a:t>
             </a:r>
-            <a:endParaRPr lang="en-US" sz="1600" dirty="0"/>
+            <a:endParaRPr lang="en-US" sz="2000" dirty="0"/>
           </a:p>
         </p:txBody>
       </p:sp>
@@ -1927,8 +1977,8 @@
         </p:nvSpPr>
         <p:spPr>
           <a:xfrm>
-            <a:off x="365760" y="3337560"/>
-            <a:ext cx="8412480" cy="1371600"/>
+            <a:off x="365760" y="3281266"/>
+            <a:ext cx="8412480" cy="1982986"/>
           </a:xfrm>
           <a:prstGeom prst="rect">
             <a:avLst/>
@@ -1940,11 +1990,11 @@
           <a:bodyPr wrap="square" lIns="0" tIns="0" rIns="0" bIns="0" rtlCol="0" anchor="t"/>
           <a:lstStyle/>
           <a:p>
-            <a:pPr algn="l" indent="0" marL="0">
+            <a:pPr marL="0" indent="0" algn="l">
               <a:buNone/>
             </a:pPr>
             <a:r>
-              <a:rPr lang="en-US" sz="1350" b="1" dirty="0">
+              <a:rPr lang="en-US" b="1" dirty="0">
                 <a:solidFill>
                   <a:srgbClr val="1F497D"/>
                 </a:solidFill>
@@ -1952,14 +2002,11 @@
                 <a:ea typeface="Arial" pitchFamily="34" charset="-122"/>
                 <a:cs typeface="Arial" pitchFamily="34" charset="-120"/>
               </a:rPr>
-              <a:t>In a mixed household, everyone carries a post — not fathers only:
+              <a:t>In a mixed household, everyone carries a post → not fathers only:
 </a:t>
             </a:r>
-            <a:pPr algn="l" indent="0" marL="0">
-              <a:buNone/>
-            </a:pPr>
-            <a:r>
-              <a:rPr lang="en-US" sz="1250" dirty="0">
+            <a:r>
+              <a:rPr lang="en-US" dirty="0">
                 <a:solidFill>
                   <a:srgbClr val="000000"/>
                 </a:solidFill>
@@ -1967,39 +2014,11 @@
                 <a:ea typeface="Arial" pitchFamily="34" charset="-122"/>
                 <a:cs typeface="Arial" pitchFamily="34" charset="-120"/>
               </a:rPr>
-              <a:t>•  Husbands &amp; wives — love as Christ loved; “so that your prayers will not be hindered” (Eph 5:25; 1 Pet 3:7)
-</a:t>
-            </a:r>
-            <a:pPr algn="l" indent="0" marL="0">
-              <a:buNone/>
-            </a:pPr>
-            <a:r>
-              <a:rPr lang="en-US" sz="1250" dirty="0">
-                <a:solidFill>
-                  <a:srgbClr val="000000"/>
-                </a:solidFill>
-                <a:latin typeface="Arial" pitchFamily="34" charset="0"/>
-                <a:ea typeface="Arial" pitchFamily="34" charset="-122"/>
-                <a:cs typeface="Arial" pitchFamily="34" charset="-120"/>
-              </a:rPr>
-              <a:t>•  Fathers &amp; mothers — raise them “in the instruction of the Lord” (Eph 6:4); older women teach younger (Titus 2)
-</a:t>
-            </a:r>
-            <a:pPr algn="l" indent="0" marL="0">
-              <a:buNone/>
-            </a:pPr>
-            <a:r>
-              <a:rPr lang="en-US" sz="1250" dirty="0">
-                <a:solidFill>
-                  <a:srgbClr val="000000"/>
-                </a:solidFill>
-                <a:latin typeface="Arial" pitchFamily="34" charset="0"/>
-                <a:ea typeface="Arial" pitchFamily="34" charset="-122"/>
-                <a:cs typeface="Arial" pitchFamily="34" charset="-120"/>
-              </a:rPr>
-              <a:t>•  Grandparents &amp; singles — Timothy’s faith came through Lois &amp; Eunice, a grandmother and mother (2 Tim 1:5)</a:t>
-            </a:r>
-            <a:endParaRPr lang="en-US" sz="1600" dirty="0"/>
+              <a:t>•  Husbands &amp; wives → love as Christ loved; “so that your prayers will not be hindered” (Eph 5:25; 1 Pet 3:7)
+•  Fathers &amp; mothers → raise them “in the instruction of the Lord” (Eph 6:4); older women teach younger (Titus 2)
+•  Grandparents &amp; singles → Timothy’s faith came through Lois &amp; Eunice, a grandmother and mother (2 Tim 1:5)</a:t>
+            </a:r>
+            <a:endParaRPr lang="en-US" sz="2400" dirty="0"/>
           </a:p>
         </p:txBody>
       </p:sp>
@@ -2011,7 +2030,7 @@
         </p:nvSpPr>
         <p:spPr>
           <a:xfrm>
-            <a:off x="365760" y="4800600"/>
+            <a:off x="365760" y="5403715"/>
             <a:ext cx="8412480" cy="1234440"/>
           </a:xfrm>
           <a:prstGeom prst="rect">
@@ -2024,11 +2043,11 @@
           <a:bodyPr wrap="square" lIns="0" tIns="0" rIns="0" bIns="0" rtlCol="0" anchor="t"/>
           <a:lstStyle/>
           <a:p>
-            <a:pPr algn="l" indent="0" marL="0">
+            <a:pPr marL="0" indent="0" algn="l">
               <a:buNone/>
             </a:pPr>
             <a:r>
-              <a:rPr lang="en-US" sz="1400" b="1" dirty="0">
+              <a:rPr lang="en-US" sz="2000" b="1" dirty="0">
                 <a:solidFill>
                   <a:srgbClr val="1F497D"/>
                 </a:solidFill>
@@ -2036,13 +2055,10 @@
                 <a:ea typeface="Arial" pitchFamily="34" charset="-122"/>
                 <a:cs typeface="Arial" pitchFamily="34" charset="-120"/>
               </a:rPr>
-              <a:t>Notice 1 Peter 3:7 — </a:t>
-            </a:r>
-            <a:pPr algn="l" indent="0" marL="0">
-              <a:buNone/>
-            </a:pPr>
-            <a:r>
-              <a:rPr lang="en-US" sz="1400" dirty="0">
+              <a:t>Notice 1 Peter 3:7 → </a:t>
+            </a:r>
+            <a:r>
+              <a:rPr lang="en-US" sz="2000" dirty="0">
                 <a:solidFill>
                   <a:srgbClr val="000000"/>
                 </a:solidFill>
@@ -2050,9 +2066,9 @@
                 <a:ea typeface="Arial" pitchFamily="34" charset="-122"/>
                 <a:cs typeface="Arial" pitchFamily="34" charset="-120"/>
               </a:rPr>
-              <a:t>how you treat your family is wired to your access to God: love badly at home, and “your prayers will be hindered.” The household is not a break from worship. It is worship’s proving ground — where the living sacrifice is offered first.</a:t>
-            </a:r>
-            <a:endParaRPr lang="en-US" sz="1600" dirty="0"/>
+              <a:t>how you treat your family is wired to your access to God: love badly at home, and “your prayers will be hindered.” The household is not a break from worship. It is worship’s proving ground → where the living sacrifice is offered first.</a:t>
+            </a:r>
+            <a:endParaRPr lang="en-US" sz="2400" dirty="0"/>
           </a:p>
         </p:txBody>
       </p:sp>
@@ -2070,26 +2086,26 @@
               <p:cTn id="2" dur="indefinite" nodeType="mainSeq">
                 <p:childTnLst>
                   <p:par>
-                    <p:cTn id="7" fill="hold">
+                    <p:cTn id="3" fill="hold">
                       <p:stCondLst>
                         <p:cond delay="indefinite"/>
                       </p:stCondLst>
                       <p:childTnLst>
                         <p:par>
-                          <p:cTn id="8" fill="hold">
+                          <p:cTn id="4" fill="hold">
                             <p:stCondLst>
                               <p:cond delay="0"/>
                             </p:stCondLst>
                             <p:childTnLst>
                               <p:par>
-                                <p:cTn id="3" presetID="42" presetClass="entr" presetSubtype="0" fill="hold" grpId="0" nodeType="clickEffect">
+                                <p:cTn id="5" presetID="42" presetClass="entr" presetSubtype="0" fill="hold" nodeType="clickEffect">
                                   <p:stCondLst>
                                     <p:cond delay="0"/>
                                   </p:stCondLst>
                                   <p:childTnLst>
                                     <p:set>
                                       <p:cBhvr>
-                                        <p:cTn id="4" dur="1" fill="hold">
+                                        <p:cTn id="6" dur="1" fill="hold">
                                           <p:stCondLst>
                                             <p:cond delay="0"/>
                                           </p:stCondLst>
@@ -2107,7 +2123,7 @@
                                     </p:set>
                                     <p:animEffect transition="in" filter="fade">
                                       <p:cBhvr>
-                                        <p:cTn id="5" dur="1000"/>
+                                        <p:cTn id="7" dur="1000"/>
                                         <p:tgtEl>
                                           <p:spTgt spid="4"/>
                                         </p:tgtEl>
@@ -2115,7 +2131,7 @@
                                     </p:animEffect>
                                     <p:anim calcmode="lin" valueType="num">
                                       <p:cBhvr>
-                                        <p:cTn id="6" dur="1000" fill="hold"/>
+                                        <p:cTn id="8" dur="1000" fill="hold"/>
                                         <p:tgtEl>
                                           <p:spTgt spid="4"/>
                                         </p:tgtEl>
@@ -2146,26 +2162,26 @@
                     </p:cTn>
                   </p:par>
                   <p:par>
-                    <p:cTn id="13" fill="hold">
+                    <p:cTn id="9" fill="hold">
                       <p:stCondLst>
                         <p:cond delay="indefinite"/>
                       </p:stCondLst>
                       <p:childTnLst>
                         <p:par>
-                          <p:cTn id="14" fill="hold">
+                          <p:cTn id="10" fill="hold">
                             <p:stCondLst>
                               <p:cond delay="0"/>
                             </p:stCondLst>
                             <p:childTnLst>
                               <p:par>
-                                <p:cTn id="9" presetID="42" presetClass="entr" presetSubtype="0" fill="hold" grpId="0" nodeType="clickEffect">
+                                <p:cTn id="11" presetID="42" presetClass="entr" presetSubtype="0" fill="hold" nodeType="clickEffect">
                                   <p:stCondLst>
                                     <p:cond delay="0"/>
                                   </p:stCondLst>
                                   <p:childTnLst>
                                     <p:set>
                                       <p:cBhvr>
-                                        <p:cTn id="10" dur="1" fill="hold">
+                                        <p:cTn id="12" dur="1" fill="hold">
                                           <p:stCondLst>
                                             <p:cond delay="0"/>
                                           </p:stCondLst>
@@ -2183,7 +2199,7 @@
                                     </p:set>
                                     <p:animEffect transition="in" filter="fade">
                                       <p:cBhvr>
-                                        <p:cTn id="11" dur="1000"/>
+                                        <p:cTn id="13" dur="1000"/>
                                         <p:tgtEl>
                                           <p:spTgt spid="5"/>
                                         </p:tgtEl>
@@ -2191,7 +2207,7 @@
                                     </p:animEffect>
                                     <p:anim calcmode="lin" valueType="num">
                                       <p:cBhvr>
-                                        <p:cTn id="12" dur="1000" fill="hold"/>
+                                        <p:cTn id="14" dur="1000" fill="hold"/>
                                         <p:tgtEl>
                                           <p:spTgt spid="5"/>
                                         </p:tgtEl>
@@ -2222,26 +2238,26 @@
                     </p:cTn>
                   </p:par>
                   <p:par>
-                    <p:cTn id="19" fill="hold">
+                    <p:cTn id="15" fill="hold">
                       <p:stCondLst>
                         <p:cond delay="indefinite"/>
                       </p:stCondLst>
                       <p:childTnLst>
                         <p:par>
-                          <p:cTn id="20" fill="hold">
+                          <p:cTn id="16" fill="hold">
                             <p:stCondLst>
                               <p:cond delay="0"/>
                             </p:stCondLst>
                             <p:childTnLst>
                               <p:par>
-                                <p:cTn id="15" presetID="42" presetClass="entr" presetSubtype="0" fill="hold" grpId="0" nodeType="clickEffect">
+                                <p:cTn id="17" presetID="42" presetClass="entr" presetSubtype="0" fill="hold" nodeType="clickEffect">
                                   <p:stCondLst>
                                     <p:cond delay="0"/>
                                   </p:stCondLst>
                                   <p:childTnLst>
                                     <p:set>
                                       <p:cBhvr>
-                                        <p:cTn id="16" dur="1" fill="hold">
+                                        <p:cTn id="18" dur="1" fill="hold">
                                           <p:stCondLst>
                                             <p:cond delay="0"/>
                                           </p:stCondLst>
@@ -2259,7 +2275,7 @@
                                     </p:set>
                                     <p:animEffect transition="in" filter="fade">
                                       <p:cBhvr>
-                                        <p:cTn id="17" dur="1000"/>
+                                        <p:cTn id="19" dur="1000"/>
                                         <p:tgtEl>
                                           <p:spTgt spid="6"/>
                                         </p:tgtEl>
@@ -2267,7 +2283,7 @@
                                     </p:animEffect>
                                     <p:anim calcmode="lin" valueType="num">
                                       <p:cBhvr>
-                                        <p:cTn id="18" dur="1000" fill="hold"/>
+                                        <p:cTn id="20" dur="1000" fill="hold"/>
                                         <p:tgtEl>
                                           <p:spTgt spid="6"/>
                                         </p:tgtEl>
@@ -2298,26 +2314,26 @@
                     </p:cTn>
                   </p:par>
                   <p:par>
-                    <p:cTn id="25" fill="hold">
+                    <p:cTn id="21" fill="hold">
                       <p:stCondLst>
                         <p:cond delay="indefinite"/>
                       </p:stCondLst>
                       <p:childTnLst>
                         <p:par>
-                          <p:cTn id="26" fill="hold">
+                          <p:cTn id="22" fill="hold">
                             <p:stCondLst>
                               <p:cond delay="0"/>
                             </p:stCondLst>
                             <p:childTnLst>
                               <p:par>
-                                <p:cTn id="21" presetID="42" presetClass="entr" presetSubtype="0" fill="hold" grpId="0" nodeType="clickEffect">
+                                <p:cTn id="23" presetID="42" presetClass="entr" presetSubtype="0" fill="hold" nodeType="clickEffect">
                                   <p:stCondLst>
                                     <p:cond delay="0"/>
                                   </p:stCondLst>
                                   <p:childTnLst>
                                     <p:set>
                                       <p:cBhvr>
-                                        <p:cTn id="22" dur="1" fill="hold">
+                                        <p:cTn id="24" dur="1" fill="hold">
                                           <p:stCondLst>
                                             <p:cond delay="0"/>
                                           </p:stCondLst>
@@ -2335,7 +2351,7 @@
                                     </p:set>
                                     <p:animEffect transition="in" filter="fade">
                                       <p:cBhvr>
-                                        <p:cTn id="23" dur="1000"/>
+                                        <p:cTn id="25" dur="1000"/>
                                         <p:tgtEl>
                                           <p:spTgt spid="7"/>
                                         </p:tgtEl>
@@ -2343,7 +2359,7 @@
                                     </p:animEffect>
                                     <p:anim calcmode="lin" valueType="num">
                                       <p:cBhvr>
-                                        <p:cTn id="24" dur="1000" fill="hold"/>
+                                        <p:cTn id="26" dur="1000" fill="hold"/>
                                         <p:tgtEl>
                                           <p:spTgt spid="7"/>
                                         </p:tgtEl>
@@ -2436,7 +2452,7 @@
           <a:bodyPr wrap="square" lIns="0" tIns="0" rIns="0" bIns="0" rtlCol="0" anchor="t"/>
           <a:lstStyle/>
           <a:p>
-            <a:pPr algn="l" indent="0" marL="0">
+            <a:pPr marL="0" indent="0" algn="l">
               <a:buNone/>
             </a:pPr>
             <a:r>
@@ -2475,11 +2491,11 @@
           <a:bodyPr wrap="square" lIns="0" tIns="0" rIns="0" bIns="0" rtlCol="0" anchor="t"/>
           <a:lstStyle/>
           <a:p>
-            <a:pPr algn="l" indent="0" marL="0">
+            <a:pPr marL="0" indent="0" algn="l">
               <a:buNone/>
             </a:pPr>
             <a:r>
-              <a:rPr lang="en-US" sz="1300" b="1" dirty="0">
+              <a:rPr lang="en-US" sz="2000" b="1" dirty="0">
                 <a:solidFill>
                   <a:srgbClr val="4F81BD"/>
                 </a:solidFill>
@@ -2487,9 +2503,9 @@
                 <a:ea typeface="Arial" pitchFamily="34" charset="-122"/>
                 <a:cs typeface="Arial" pitchFamily="34" charset="-120"/>
               </a:rPr>
-              <a:t>Receive and hand on — never invent</a:t>
-            </a:r>
-            <a:endParaRPr lang="en-US" sz="1600" dirty="0"/>
+              <a:t>Receive and hand on → never invent</a:t>
+            </a:r>
+            <a:endParaRPr lang="en-US" sz="2800" dirty="0"/>
           </a:p>
         </p:txBody>
       </p:sp>
@@ -2501,8 +2517,8 @@
         </p:nvSpPr>
         <p:spPr>
           <a:xfrm>
-            <a:off x="365760" y="1097280"/>
-            <a:ext cx="8412480" cy="1005840"/>
+            <a:off x="365760" y="993141"/>
+            <a:ext cx="8412480" cy="1060026"/>
           </a:xfrm>
           <a:prstGeom prst="rect">
             <a:avLst/>
@@ -2514,11 +2530,11 @@
           <a:bodyPr wrap="square" lIns="0" tIns="0" rIns="0" bIns="0" rtlCol="0" anchor="t"/>
           <a:lstStyle/>
           <a:p>
-            <a:pPr algn="l" indent="0" marL="0">
+            <a:pPr marL="0" indent="0" algn="l">
               <a:buNone/>
             </a:pPr>
             <a:r>
-              <a:rPr lang="en-US" sz="1500" b="1" dirty="0">
+              <a:rPr lang="en-US" b="1" dirty="0">
                 <a:solidFill>
                   <a:srgbClr val="1F497D"/>
                 </a:solidFill>
@@ -2528,11 +2544,8 @@
               </a:rPr>
               <a:t>The whole course has taught one motion: </a:t>
             </a:r>
-            <a:pPr algn="l" indent="0" marL="0">
-              <a:buNone/>
-            </a:pPr>
-            <a:r>
-              <a:rPr lang="en-US" sz="1450" dirty="0">
+            <a:r>
+              <a:rPr lang="en-US" dirty="0">
                 <a:solidFill>
                   <a:srgbClr val="000000"/>
                 </a:solidFill>
@@ -2540,9 +2553,9 @@
                 <a:ea typeface="Arial" pitchFamily="34" charset="-122"/>
                 <a:cs typeface="Arial" pitchFamily="34" charset="-120"/>
               </a:rPr>
-              <a:t>you don’t generate the faith — you RECEIVE it and HAND IT ON. Deposit and handoff (Week 10), in the church and in the home alike. The parent, like the apostle, passes on what was entrusted, not what he invented.</a:t>
-            </a:r>
-            <a:endParaRPr lang="en-US" sz="1600" dirty="0"/>
+              <a:t>you don’t generate the faith → you RECEIVE it and HAND IT ON. Deposit and handoff (Week 10), in the church and in the home alike. The parent, like the apostle, passes on what was entrusted, not what he invented.</a:t>
+            </a:r>
+            <a:endParaRPr lang="en-US" sz="2000" dirty="0"/>
           </a:p>
         </p:txBody>
       </p:sp>
@@ -2554,8 +2567,8 @@
         </p:nvSpPr>
         <p:spPr>
           <a:xfrm>
-            <a:off x="365760" y="2240280"/>
-            <a:ext cx="8412480" cy="914400"/>
+            <a:off x="365760" y="2292774"/>
+            <a:ext cx="8412480" cy="1060026"/>
           </a:xfrm>
           <a:prstGeom prst="rect">
             <a:avLst/>
@@ -2567,11 +2580,11 @@
           <a:bodyPr wrap="square" lIns="0" tIns="0" rIns="0" bIns="0" rtlCol="0" anchor="t"/>
           <a:lstStyle/>
           <a:p>
-            <a:pPr algn="l" indent="0" marL="0">
+            <a:pPr marL="0" indent="0" algn="l">
               <a:buNone/>
             </a:pPr>
             <a:r>
-              <a:rPr lang="en-US" sz="1500" b="1" i="1" dirty="0">
+              <a:rPr lang="en-US" b="1" i="1" dirty="0">
                 <a:solidFill>
                   <a:srgbClr val="000000"/>
                 </a:solidFill>
@@ -2581,11 +2594,25 @@
               </a:rPr>
               <a:t>“what you heard from me… entrust to faithful people who will be competent to teach others” </a:t>
             </a:r>
-            <a:pPr algn="l" indent="0" marL="0">
+            <a:r>
+              <a:rPr lang="en-US" b="1" dirty="0">
+                <a:solidFill>
+                  <a:srgbClr val="000000"/>
+                </a:solidFill>
+                <a:latin typeface="Arial" pitchFamily="34" charset="0"/>
+                <a:ea typeface="Arial" pitchFamily="34" charset="-122"/>
+                <a:cs typeface="Arial" pitchFamily="34" charset="-120"/>
+              </a:rPr>
+              <a:t>(2 Tim 2:2)</a:t>
+            </a:r>
+            <a:endParaRPr lang="en-US" sz="2000" dirty="0"/>
+          </a:p>
+          <a:p>
+            <a:pPr marL="0" indent="0" algn="l">
               <a:buNone/>
             </a:pPr>
             <a:r>
-              <a:rPr lang="en-US" sz="1400" b="1" dirty="0">
+              <a:rPr lang="en-US" sz="1600" dirty="0">
                 <a:solidFill>
                   <a:srgbClr val="000000"/>
                 </a:solidFill>
@@ -2593,29 +2620,9 @@
                 <a:ea typeface="Arial" pitchFamily="34" charset="-122"/>
                 <a:cs typeface="Arial" pitchFamily="34" charset="-120"/>
               </a:rPr>
-              <a:t>(2 Tim 2:2)</a:t>
-            </a:r>
-            <a:pPr algn="l" indent="0" marL="0">
-              <a:buNone/>
-            </a:pPr>
-            <a:endParaRPr lang="en-US" sz="1600" dirty="0"/>
-          </a:p>
-          <a:p>
-            <a:pPr algn="l" indent="0" marL="0">
-              <a:buNone/>
-            </a:pPr>
-            <a:r>
-              <a:rPr lang="en-US" sz="1300" dirty="0">
-                <a:solidFill>
-                  <a:srgbClr val="000000"/>
-                </a:solidFill>
-                <a:latin typeface="Arial" pitchFamily="34" charset="0"/>
-                <a:ea typeface="Arial" pitchFamily="34" charset="-122"/>
-                <a:cs typeface="Arial" pitchFamily="34" charset="-120"/>
-              </a:rPr>
               <a:t>Paul → Timothy → faithful people → others. And Timothy → from Lois &amp; Eunice. The relay runs through pulpits AND kitchens.</a:t>
             </a:r>
-            <a:endParaRPr lang="en-US" sz="1600" dirty="0"/>
+            <a:endParaRPr lang="en-US" sz="2000" dirty="0"/>
           </a:p>
         </p:txBody>
       </p:sp>
@@ -2627,7 +2634,7 @@
         </p:nvSpPr>
         <p:spPr>
           <a:xfrm>
-            <a:off x="365760" y="3291840"/>
+            <a:off x="365760" y="3592407"/>
             <a:ext cx="8412480" cy="1417320"/>
           </a:xfrm>
           <a:prstGeom prst="rect">
@@ -2640,11 +2647,11 @@
           <a:bodyPr wrap="square" lIns="0" tIns="0" rIns="0" bIns="0" rtlCol="0" anchor="t"/>
           <a:lstStyle/>
           <a:p>
-            <a:pPr algn="l" indent="0" marL="0">
+            <a:pPr marL="0" indent="0" algn="l">
               <a:buNone/>
             </a:pPr>
             <a:r>
-              <a:rPr lang="en-US" sz="1400" b="1" dirty="0">
+              <a:rPr lang="en-US" b="1" dirty="0">
                 <a:solidFill>
                   <a:srgbClr val="1F497D"/>
                 </a:solidFill>
@@ -2655,11 +2662,8 @@
               <a:t>And the blemished-lamb question (Week 9) comes home too:
 </a:t>
             </a:r>
-            <a:pPr algn="l" indent="0" marL="0">
-              <a:buNone/>
-            </a:pPr>
-            <a:r>
-              <a:rPr lang="en-US" sz="1400" dirty="0">
+            <a:r>
+              <a:rPr lang="en-US" dirty="0">
                 <a:solidFill>
                   <a:srgbClr val="000000"/>
                 </a:solidFill>
@@ -2667,13 +2671,10 @@
                 <a:ea typeface="Arial" pitchFamily="34" charset="-122"/>
                 <a:cs typeface="Arial" pitchFamily="34" charset="-120"/>
               </a:rPr>
-              <a:t>If the time and attention you give your household this week were an animal brought to Malachi’s altar — what condition would it be in? The best of the flock, or the exhausted leftover? </a:t>
-            </a:r>
-            <a:pPr algn="l" indent="0" marL="0">
-              <a:buNone/>
-            </a:pPr>
-            <a:r>
-              <a:rPr lang="en-US" sz="1350" i="1" dirty="0">
+              <a:t>If the time and attention you give your household this week were an animal brought to Malachi’s altar → what condition would it be in? The best of the flock, or the exhausted leftover? </a:t>
+            </a:r>
+            <a:r>
+              <a:rPr lang="en-US" sz="1600" i="1" dirty="0">
                 <a:solidFill>
                   <a:srgbClr val="000000"/>
                 </a:solidFill>
@@ -2681,9 +2682,9 @@
                 <a:ea typeface="Arial" pitchFamily="34" charset="-122"/>
                 <a:cs typeface="Arial" pitchFamily="34" charset="-120"/>
               </a:rPr>
-              <a:t>“I will not offer… sacrifices that cost me nothing” (2 Sam 24:24) — and the people under your roof are where the cost is realest.</a:t>
-            </a:r>
-            <a:endParaRPr lang="en-US" sz="1600" dirty="0"/>
+              <a:t>“I will not offer… sacrifices that cost me nothing” (2 Sam 24:24) → and the people under your roof are where the cost is realest.</a:t>
+            </a:r>
+            <a:endParaRPr lang="en-US" sz="2000" dirty="0"/>
           </a:p>
         </p:txBody>
       </p:sp>
@@ -2695,7 +2696,7 @@
         </p:nvSpPr>
         <p:spPr>
           <a:xfrm>
-            <a:off x="365760" y="4800600"/>
+            <a:off x="306493" y="5249334"/>
             <a:ext cx="8412480" cy="1234440"/>
           </a:xfrm>
           <a:prstGeom prst="rect">
@@ -2708,11 +2709,11 @@
           <a:bodyPr wrap="square" lIns="0" tIns="0" rIns="0" bIns="0" rtlCol="0" anchor="t"/>
           <a:lstStyle/>
           <a:p>
-            <a:pPr algn="l" indent="0" marL="0">
+            <a:pPr marL="0" indent="0" algn="l">
               <a:buNone/>
             </a:pPr>
             <a:r>
-              <a:rPr lang="en-US" sz="1400" b="1" dirty="0">
+              <a:rPr lang="en-US" b="1" dirty="0">
                 <a:solidFill>
                   <a:srgbClr val="1F497D"/>
                 </a:solidFill>
@@ -2722,11 +2723,8 @@
               </a:rPr>
               <a:t>This is discipleship’s ordinary shape: </a:t>
             </a:r>
-            <a:pPr algn="l" indent="0" marL="0">
-              <a:buNone/>
-            </a:pPr>
-            <a:r>
-              <a:rPr lang="en-US" sz="1400" dirty="0">
+            <a:r>
+              <a:rPr lang="en-US" dirty="0">
                 <a:solidFill>
                   <a:srgbClr val="000000"/>
                 </a:solidFill>
@@ -2734,9 +2732,9 @@
                 <a:ea typeface="Arial" pitchFamily="34" charset="-122"/>
                 <a:cs typeface="Arial" pitchFamily="34" charset="-120"/>
               </a:rPr>
-              <a:t>not a platform or a title, but a life received in trust and handed to the next person — a child, a friend, a new believer, a grandchild. Everyone in this room is a link in a relay that reaches back to the apostles and forward past your lifetime.</a:t>
-            </a:r>
-            <a:endParaRPr lang="en-US" sz="1600" dirty="0"/>
+              <a:t>not a platform or a title, but a life received in trust and handed to the next person → a child, a friend, a new believer, a grandchild. Everyone in this room is a link in a relay that reaches back to the apostles and forward past your lifetime.</a:t>
+            </a:r>
+            <a:endParaRPr lang="en-US" sz="2000" dirty="0"/>
           </a:p>
         </p:txBody>
       </p:sp>
@@ -2754,26 +2752,26 @@
               <p:cTn id="2" dur="indefinite" nodeType="mainSeq">
                 <p:childTnLst>
                   <p:par>
-                    <p:cTn id="7" fill="hold">
+                    <p:cTn id="3" fill="hold">
                       <p:stCondLst>
                         <p:cond delay="indefinite"/>
                       </p:stCondLst>
                       <p:childTnLst>
                         <p:par>
-                          <p:cTn id="8" fill="hold">
+                          <p:cTn id="4" fill="hold">
                             <p:stCondLst>
                               <p:cond delay="0"/>
                             </p:stCondLst>
                             <p:childTnLst>
                               <p:par>
-                                <p:cTn id="3" presetID="42" presetClass="entr" presetSubtype="0" fill="hold" grpId="0" nodeType="clickEffect">
+                                <p:cTn id="5" presetID="42" presetClass="entr" presetSubtype="0" fill="hold" nodeType="clickEffect">
                                   <p:stCondLst>
                                     <p:cond delay="0"/>
                                   </p:stCondLst>
                                   <p:childTnLst>
                                     <p:set>
                                       <p:cBhvr>
-                                        <p:cTn id="4" dur="1" fill="hold">
+                                        <p:cTn id="6" dur="1" fill="hold">
                                           <p:stCondLst>
                                             <p:cond delay="0"/>
                                           </p:stCondLst>
@@ -2791,7 +2789,7 @@
                                     </p:set>
                                     <p:animEffect transition="in" filter="fade">
                                       <p:cBhvr>
-                                        <p:cTn id="5" dur="1000"/>
+                                        <p:cTn id="7" dur="1000"/>
                                         <p:tgtEl>
                                           <p:spTgt spid="4"/>
                                         </p:tgtEl>
@@ -2799,7 +2797,7 @@
                                     </p:animEffect>
                                     <p:anim calcmode="lin" valueType="num">
                                       <p:cBhvr>
-                                        <p:cTn id="6" dur="1000" fill="hold"/>
+                                        <p:cTn id="8" dur="1000" fill="hold"/>
                                         <p:tgtEl>
                                           <p:spTgt spid="4"/>
                                         </p:tgtEl>
@@ -2830,26 +2828,26 @@
                     </p:cTn>
                   </p:par>
                   <p:par>
-                    <p:cTn id="13" fill="hold">
+                    <p:cTn id="9" fill="hold">
                       <p:stCondLst>
                         <p:cond delay="indefinite"/>
                       </p:stCondLst>
                       <p:childTnLst>
                         <p:par>
-                          <p:cTn id="14" fill="hold">
+                          <p:cTn id="10" fill="hold">
                             <p:stCondLst>
                               <p:cond delay="0"/>
                             </p:stCondLst>
                             <p:childTnLst>
                               <p:par>
-                                <p:cTn id="9" presetID="42" presetClass="entr" presetSubtype="0" fill="hold" grpId="0" nodeType="clickEffect">
+                                <p:cTn id="11" presetID="42" presetClass="entr" presetSubtype="0" fill="hold" nodeType="clickEffect">
                                   <p:stCondLst>
                                     <p:cond delay="0"/>
                                   </p:stCondLst>
                                   <p:childTnLst>
                                     <p:set>
                                       <p:cBhvr>
-                                        <p:cTn id="10" dur="1" fill="hold">
+                                        <p:cTn id="12" dur="1" fill="hold">
                                           <p:stCondLst>
                                             <p:cond delay="0"/>
                                           </p:stCondLst>
@@ -2867,7 +2865,7 @@
                                     </p:set>
                                     <p:animEffect transition="in" filter="fade">
                                       <p:cBhvr>
-                                        <p:cTn id="11" dur="1000"/>
+                                        <p:cTn id="13" dur="1000"/>
                                         <p:tgtEl>
                                           <p:spTgt spid="5"/>
                                         </p:tgtEl>
@@ -2875,7 +2873,7 @@
                                     </p:animEffect>
                                     <p:anim calcmode="lin" valueType="num">
                                       <p:cBhvr>
-                                        <p:cTn id="12" dur="1000" fill="hold"/>
+                                        <p:cTn id="14" dur="1000" fill="hold"/>
                                         <p:tgtEl>
                                           <p:spTgt spid="5"/>
                                         </p:tgtEl>
@@ -2906,26 +2904,26 @@
                     </p:cTn>
                   </p:par>
                   <p:par>
-                    <p:cTn id="19" fill="hold">
+                    <p:cTn id="15" fill="hold">
                       <p:stCondLst>
                         <p:cond delay="indefinite"/>
                       </p:stCondLst>
                       <p:childTnLst>
                         <p:par>
-                          <p:cTn id="20" fill="hold">
+                          <p:cTn id="16" fill="hold">
                             <p:stCondLst>
                               <p:cond delay="0"/>
                             </p:stCondLst>
                             <p:childTnLst>
                               <p:par>
-                                <p:cTn id="15" presetID="42" presetClass="entr" presetSubtype="0" fill="hold" grpId="0" nodeType="clickEffect">
+                                <p:cTn id="17" presetID="42" presetClass="entr" presetSubtype="0" fill="hold" nodeType="clickEffect">
                                   <p:stCondLst>
                                     <p:cond delay="0"/>
                                   </p:stCondLst>
                                   <p:childTnLst>
                                     <p:set>
                                       <p:cBhvr>
-                                        <p:cTn id="16" dur="1" fill="hold">
+                                        <p:cTn id="18" dur="1" fill="hold">
                                           <p:stCondLst>
                                             <p:cond delay="0"/>
                                           </p:stCondLst>
@@ -2943,7 +2941,7 @@
                                     </p:set>
                                     <p:animEffect transition="in" filter="fade">
                                       <p:cBhvr>
-                                        <p:cTn id="17" dur="1000"/>
+                                        <p:cTn id="19" dur="1000"/>
                                         <p:tgtEl>
                                           <p:spTgt spid="6"/>
                                         </p:tgtEl>
@@ -2951,7 +2949,7 @@
                                     </p:animEffect>
                                     <p:anim calcmode="lin" valueType="num">
                                       <p:cBhvr>
-                                        <p:cTn id="18" dur="1000" fill="hold"/>
+                                        <p:cTn id="20" dur="1000" fill="hold"/>
                                         <p:tgtEl>
                                           <p:spTgt spid="6"/>
                                         </p:tgtEl>
@@ -2982,26 +2980,26 @@
                     </p:cTn>
                   </p:par>
                   <p:par>
-                    <p:cTn id="25" fill="hold">
+                    <p:cTn id="21" fill="hold">
                       <p:stCondLst>
                         <p:cond delay="indefinite"/>
                       </p:stCondLst>
                       <p:childTnLst>
                         <p:par>
-                          <p:cTn id="26" fill="hold">
+                          <p:cTn id="22" fill="hold">
                             <p:stCondLst>
                               <p:cond delay="0"/>
                             </p:stCondLst>
                             <p:childTnLst>
                               <p:par>
-                                <p:cTn id="21" presetID="42" presetClass="entr" presetSubtype="0" fill="hold" grpId="0" nodeType="clickEffect">
+                                <p:cTn id="23" presetID="42" presetClass="entr" presetSubtype="0" fill="hold" nodeType="clickEffect">
                                   <p:stCondLst>
                                     <p:cond delay="0"/>
                                   </p:stCondLst>
                                   <p:childTnLst>
                                     <p:set>
                                       <p:cBhvr>
-                                        <p:cTn id="22" dur="1" fill="hold">
+                                        <p:cTn id="24" dur="1" fill="hold">
                                           <p:stCondLst>
                                             <p:cond delay="0"/>
                                           </p:stCondLst>
@@ -3019,7 +3017,7 @@
                                     </p:set>
                                     <p:animEffect transition="in" filter="fade">
                                       <p:cBhvr>
-                                        <p:cTn id="23" dur="1000"/>
+                                        <p:cTn id="25" dur="1000"/>
                                         <p:tgtEl>
                                           <p:spTgt spid="7"/>
                                         </p:tgtEl>
@@ -3027,7 +3025,7 @@
                                     </p:animEffect>
                                     <p:anim calcmode="lin" valueType="num">
                                       <p:cBhvr>
-                                        <p:cTn id="24" dur="1000" fill="hold"/>
+                                        <p:cTn id="26" dur="1000" fill="hold"/>
                                         <p:tgtEl>
                                           <p:spTgt spid="7"/>
                                         </p:tgtEl>
@@ -3120,7 +3118,7 @@
           <a:bodyPr wrap="square" lIns="0" tIns="0" rIns="0" bIns="0" rtlCol="0" anchor="t"/>
           <a:lstStyle/>
           <a:p>
-            <a:pPr algn="l" indent="0" marL="0">
+            <a:pPr marL="0" indent="0" algn="l">
               <a:buNone/>
             </a:pPr>
             <a:r>
@@ -3159,11 +3157,11 @@
           <a:bodyPr wrap="square" lIns="0" tIns="0" rIns="0" bIns="0" rtlCol="0" anchor="t"/>
           <a:lstStyle/>
           <a:p>
-            <a:pPr algn="l" indent="0" marL="0">
+            <a:pPr marL="0" indent="0" algn="l">
               <a:buNone/>
             </a:pPr>
             <a:r>
-              <a:rPr lang="en-US" sz="1300" b="1" dirty="0">
+              <a:rPr lang="en-US" sz="2000" b="1" dirty="0">
                 <a:solidFill>
                   <a:srgbClr val="4F81BD"/>
                 </a:solidFill>
@@ -3171,9 +3169,9 @@
                 <a:ea typeface="Arial" pitchFamily="34" charset="-122"/>
                 <a:cs typeface="Arial" pitchFamily="34" charset="-120"/>
               </a:rPr>
-              <a:t>Matthew 28 — and “by this time you ought to be teachers”</a:t>
-            </a:r>
-            <a:endParaRPr lang="en-US" sz="1600" dirty="0"/>
+              <a:t>Matthew 28 → and “by this time you ought to be teachers”</a:t>
+            </a:r>
+            <a:endParaRPr lang="en-US" sz="2800" dirty="0"/>
           </a:p>
         </p:txBody>
       </p:sp>
@@ -3186,7 +3184,7 @@
         <p:spPr>
           <a:xfrm>
             <a:off x="365760" y="1051560"/>
-            <a:ext cx="8412480" cy="1600200"/>
+            <a:ext cx="8412480" cy="1463040"/>
           </a:xfrm>
           <a:prstGeom prst="rect">
             <a:avLst/>
@@ -3198,11 +3196,11 @@
           <a:bodyPr wrap="square" lIns="0" tIns="0" rIns="0" bIns="0" rtlCol="0" anchor="t"/>
           <a:lstStyle/>
           <a:p>
-            <a:pPr algn="l" indent="0" marL="0">
+            <a:pPr marL="0" indent="0" algn="l">
               <a:buNone/>
             </a:pPr>
             <a:r>
-              <a:rPr lang="en-US" sz="1500" i="1" dirty="0">
+              <a:rPr lang="en-US" sz="2000" i="1" dirty="0">
                 <a:solidFill>
                   <a:srgbClr val="000000"/>
                 </a:solidFill>
@@ -3212,11 +3210,8 @@
               </a:rPr>
               <a:t>“All </a:t>
             </a:r>
-            <a:pPr algn="l" indent="0" marL="0">
-              <a:buNone/>
-            </a:pPr>
-            <a:r>
-              <a:rPr lang="en-US" sz="1500" b="1" i="1" dirty="0">
+            <a:r>
+              <a:rPr lang="en-US" sz="2000" b="1" i="1" dirty="0">
                 <a:solidFill>
                   <a:srgbClr val="1F497D"/>
                 </a:solidFill>
@@ -3226,11 +3221,8 @@
               </a:rPr>
               <a:t>authority</a:t>
             </a:r>
-            <a:pPr algn="l" indent="0" marL="0">
-              <a:buNone/>
-            </a:pPr>
-            <a:r>
-              <a:rPr lang="en-US" sz="1500" i="1" dirty="0">
+            <a:r>
+              <a:rPr lang="en-US" sz="2000" i="1" dirty="0">
                 <a:solidFill>
                   <a:srgbClr val="000000"/>
                 </a:solidFill>
@@ -3240,11 +3232,8 @@
               </a:rPr>
               <a:t> in heaven and on earth has been given to me. Therefore </a:t>
             </a:r>
-            <a:pPr algn="l" indent="0" marL="0">
-              <a:buNone/>
-            </a:pPr>
-            <a:r>
-              <a:rPr lang="en-US" sz="1500" b="1" i="1" dirty="0">
+            <a:r>
+              <a:rPr lang="en-US" sz="2000" b="1" i="1" dirty="0">
                 <a:solidFill>
                   <a:srgbClr val="1F497D"/>
                 </a:solidFill>
@@ -3254,11 +3243,8 @@
               </a:rPr>
               <a:t>go</a:t>
             </a:r>
-            <a:pPr algn="l" indent="0" marL="0">
-              <a:buNone/>
-            </a:pPr>
-            <a:r>
-              <a:rPr lang="en-US" sz="1500" i="1" dirty="0">
+            <a:r>
+              <a:rPr lang="en-US" sz="2000" i="1" dirty="0">
                 <a:solidFill>
                   <a:srgbClr val="000000"/>
                 </a:solidFill>
@@ -3268,11 +3254,8 @@
               </a:rPr>
               <a:t> and make </a:t>
             </a:r>
-            <a:pPr algn="l" indent="0" marL="0">
-              <a:buNone/>
-            </a:pPr>
-            <a:r>
-              <a:rPr lang="en-US" sz="1500" b="1" i="1" dirty="0">
+            <a:r>
+              <a:rPr lang="en-US" sz="2000" b="1" i="1" dirty="0">
                 <a:solidFill>
                   <a:srgbClr val="1F497D"/>
                 </a:solidFill>
@@ -3282,11 +3265,8 @@
               </a:rPr>
               <a:t>disciples</a:t>
             </a:r>
-            <a:pPr algn="l" indent="0" marL="0">
-              <a:buNone/>
-            </a:pPr>
-            <a:r>
-              <a:rPr lang="en-US" sz="1500" i="1" dirty="0">
+            <a:r>
+              <a:rPr lang="en-US" sz="2000" i="1" dirty="0">
                 <a:solidFill>
                   <a:srgbClr val="000000"/>
                 </a:solidFill>
@@ -3296,11 +3276,8 @@
               </a:rPr>
               <a:t> of all nations, </a:t>
             </a:r>
-            <a:pPr algn="l" indent="0" marL="0">
-              <a:buNone/>
-            </a:pPr>
-            <a:r>
-              <a:rPr lang="en-US" sz="1500" b="1" i="1" dirty="0">
+            <a:r>
+              <a:rPr lang="en-US" sz="2000" b="1" i="1" dirty="0">
                 <a:solidFill>
                   <a:srgbClr val="1F497D"/>
                 </a:solidFill>
@@ -3310,11 +3287,8 @@
               </a:rPr>
               <a:t>baptizing</a:t>
             </a:r>
-            <a:pPr algn="l" indent="0" marL="0">
-              <a:buNone/>
-            </a:pPr>
-            <a:r>
-              <a:rPr lang="en-US" sz="1500" i="1" dirty="0">
+            <a:r>
+              <a:rPr lang="en-US" sz="2000" i="1" dirty="0">
                 <a:solidFill>
                   <a:srgbClr val="000000"/>
                 </a:solidFill>
@@ -3324,11 +3298,8 @@
               </a:rPr>
               <a:t> them… and </a:t>
             </a:r>
-            <a:pPr algn="l" indent="0" marL="0">
-              <a:buNone/>
-            </a:pPr>
-            <a:r>
-              <a:rPr lang="en-US" sz="1500" b="1" i="1" dirty="0">
+            <a:r>
+              <a:rPr lang="en-US" sz="2000" b="1" i="1" dirty="0">
                 <a:solidFill>
                   <a:srgbClr val="1F497D"/>
                 </a:solidFill>
@@ -3338,11 +3309,8 @@
               </a:rPr>
               <a:t>teaching</a:t>
             </a:r>
-            <a:pPr algn="l" indent="0" marL="0">
-              <a:buNone/>
-            </a:pPr>
-            <a:r>
-              <a:rPr lang="en-US" sz="1500" i="1" dirty="0">
+            <a:r>
+              <a:rPr lang="en-US" sz="2000" i="1" dirty="0">
                 <a:solidFill>
                   <a:srgbClr val="000000"/>
                 </a:solidFill>
@@ -3352,11 +3320,8 @@
               </a:rPr>
               <a:t> them to </a:t>
             </a:r>
-            <a:pPr algn="l" indent="0" marL="0">
-              <a:buNone/>
-            </a:pPr>
-            <a:r>
-              <a:rPr lang="en-US" sz="1600" b="1" i="1" dirty="0">
+            <a:r>
+              <a:rPr lang="en-US" sz="2400" b="1" i="1" dirty="0">
                 <a:solidFill>
                   <a:srgbClr val="B0413E"/>
                 </a:solidFill>
@@ -3366,11 +3331,8 @@
               </a:rPr>
               <a:t>obey</a:t>
             </a:r>
-            <a:pPr algn="l" indent="0" marL="0">
-              <a:buNone/>
-            </a:pPr>
-            <a:r>
-              <a:rPr lang="en-US" sz="1500" i="1" dirty="0">
+            <a:r>
+              <a:rPr lang="en-US" sz="2000" i="1" dirty="0">
                 <a:solidFill>
                   <a:srgbClr val="000000"/>
                 </a:solidFill>
@@ -3380,11 +3342,8 @@
               </a:rPr>
               <a:t> everything I have commanded you. And remember, I am with you always, to the end of the age.”  </a:t>
             </a:r>
-            <a:pPr algn="l" indent="0" marL="0">
-              <a:buNone/>
-            </a:pPr>
-            <a:r>
-              <a:rPr lang="en-US" sz="1400" b="1" dirty="0">
+            <a:r>
+              <a:rPr lang="en-US" sz="2000" b="1" dirty="0">
                 <a:solidFill>
                   <a:srgbClr val="000000"/>
                 </a:solidFill>
@@ -3394,7 +3353,7 @@
               </a:rPr>
               <a:t>(Matthew 28:18–20)</a:t>
             </a:r>
-            <a:endParaRPr lang="en-US" sz="1600" dirty="0"/>
+            <a:endParaRPr lang="en-US" sz="2400" dirty="0"/>
           </a:p>
         </p:txBody>
       </p:sp>
@@ -3406,7 +3365,7 @@
         </p:nvSpPr>
         <p:spPr>
           <a:xfrm>
-            <a:off x="365760" y="2788920"/>
+            <a:off x="365760" y="2514600"/>
             <a:ext cx="8412480" cy="914400"/>
           </a:xfrm>
           <a:prstGeom prst="rect">
@@ -3419,11 +3378,11 @@
           <a:bodyPr wrap="square" lIns="0" tIns="0" rIns="0" bIns="0" rtlCol="0" anchor="t"/>
           <a:lstStyle/>
           <a:p>
-            <a:pPr algn="l" indent="0" marL="0">
+            <a:pPr marL="0" indent="0" algn="l">
               <a:buNone/>
             </a:pPr>
             <a:r>
-              <a:rPr lang="en-US" sz="1500" b="1" dirty="0">
+              <a:rPr lang="en-US" b="1" dirty="0">
                 <a:solidFill>
                   <a:srgbClr val="1F497D"/>
                 </a:solidFill>
@@ -3433,11 +3392,8 @@
               </a:rPr>
               <a:t>Hear the course’s own title in the Lord’s last command: </a:t>
             </a:r>
-            <a:pPr algn="l" indent="0" marL="0">
-              <a:buNone/>
-            </a:pPr>
-            <a:r>
-              <a:rPr lang="en-US" sz="1450" dirty="0">
+            <a:r>
+              <a:rPr lang="en-US" dirty="0">
                 <a:solidFill>
                   <a:srgbClr val="000000"/>
                 </a:solidFill>
@@ -3445,9 +3401,9 @@
                 <a:ea typeface="Arial" pitchFamily="34" charset="-122"/>
                 <a:cs typeface="Arial" pitchFamily="34" charset="-120"/>
               </a:rPr>
-              <a:t>“teaching them to OBEY.”  Discipleship’s goal is not merely believers who agree — it is the obedience of faith (Rom 1:5), in Jesus’ own words.</a:t>
-            </a:r>
-            <a:endParaRPr lang="en-US" sz="1600" dirty="0"/>
+              <a:t>“teaching them to OBEY.”  Discipleship’s goal is not merely believers who agree → it is the obedience of faith (Rom 1:5), in Jesus’ own words.</a:t>
+            </a:r>
+            <a:endParaRPr lang="en-US" sz="2000" dirty="0"/>
           </a:p>
         </p:txBody>
       </p:sp>
@@ -3459,8 +3415,8 @@
         </p:nvSpPr>
         <p:spPr>
           <a:xfrm>
-            <a:off x="365760" y="3794760"/>
-            <a:ext cx="8412480" cy="1234440"/>
+            <a:off x="365760" y="3566159"/>
+            <a:ext cx="8412480" cy="1454573"/>
           </a:xfrm>
           <a:prstGeom prst="rect">
             <a:avLst/>
@@ -3472,11 +3428,11 @@
           <a:bodyPr wrap="square" lIns="0" tIns="0" rIns="0" bIns="0" rtlCol="0" anchor="t"/>
           <a:lstStyle/>
           <a:p>
-            <a:pPr algn="l" indent="0" marL="0">
+            <a:pPr marL="0" indent="0" algn="l">
               <a:buNone/>
             </a:pPr>
             <a:r>
-              <a:rPr lang="en-US" sz="1400" b="1" dirty="0">
+              <a:rPr lang="en-US" b="1" dirty="0">
                 <a:solidFill>
                   <a:srgbClr val="1F497D"/>
                 </a:solidFill>
@@ -3487,11 +3443,36 @@
               <a:t>And the rebuke that opened this course now resolves into a calling:
 </a:t>
             </a:r>
-            <a:pPr algn="l" indent="0" marL="0">
+            <a:r>
+              <a:rPr lang="en-US" b="1" i="1" dirty="0">
+                <a:solidFill>
+                  <a:srgbClr val="000000"/>
+                </a:solidFill>
+                <a:latin typeface="Arial" pitchFamily="34" charset="0"/>
+                <a:ea typeface="Arial" pitchFamily="34" charset="-122"/>
+                <a:cs typeface="Arial" pitchFamily="34" charset="-120"/>
+              </a:rPr>
+              <a:t>“though you should in fact be teachers by this time, you need someone to teach you the beginning elements…” </a:t>
+            </a:r>
+            <a:r>
+              <a:rPr lang="en-US" sz="1600" b="1" dirty="0">
+                <a:solidFill>
+                  <a:srgbClr val="000000"/>
+                </a:solidFill>
+                <a:latin typeface="Arial" pitchFamily="34" charset="0"/>
+                <a:ea typeface="Arial" pitchFamily="34" charset="-122"/>
+                <a:cs typeface="Arial" pitchFamily="34" charset="-120"/>
+              </a:rPr>
+              <a:t>(Heb 5:12)</a:t>
+            </a:r>
+            <a:endParaRPr lang="en-US" sz="2000" dirty="0"/>
+          </a:p>
+          <a:p>
+            <a:pPr marL="0" indent="0" algn="l">
               <a:buNone/>
             </a:pPr>
             <a:r>
-              <a:rPr lang="en-US" sz="1450" b="1" i="1" dirty="0">
+              <a:rPr lang="en-US" sz="1600" dirty="0">
                 <a:solidFill>
                   <a:srgbClr val="000000"/>
                 </a:solidFill>
@@ -3499,43 +3480,9 @@
                 <a:ea typeface="Arial" pitchFamily="34" charset="-122"/>
                 <a:cs typeface="Arial" pitchFamily="34" charset="-120"/>
               </a:rPr>
-              <a:t>“though you should in fact be teachers by this time, you need someone to teach you the beginning elements…” </a:t>
-            </a:r>
-            <a:pPr algn="l" indent="0" marL="0">
-              <a:buNone/>
-            </a:pPr>
-            <a:r>
-              <a:rPr lang="en-US" sz="1350" b="1" dirty="0">
-                <a:solidFill>
-                  <a:srgbClr val="000000"/>
-                </a:solidFill>
-                <a:latin typeface="Arial" pitchFamily="34" charset="0"/>
-                <a:ea typeface="Arial" pitchFamily="34" charset="-122"/>
-                <a:cs typeface="Arial" pitchFamily="34" charset="-120"/>
-              </a:rPr>
-              <a:t>(Heb 5:12)</a:t>
-            </a:r>
-            <a:pPr algn="l" indent="0" marL="0">
-              <a:buNone/>
-            </a:pPr>
-            <a:endParaRPr lang="en-US" sz="1600" dirty="0"/>
-          </a:p>
-          <a:p>
-            <a:pPr algn="l" indent="0" marL="0">
-              <a:buNone/>
-            </a:pPr>
-            <a:r>
-              <a:rPr lang="en-US" sz="1350" dirty="0">
-                <a:solidFill>
-                  <a:srgbClr val="000000"/>
-                </a:solidFill>
-                <a:latin typeface="Arial" pitchFamily="34" charset="0"/>
-                <a:ea typeface="Arial" pitchFamily="34" charset="-122"/>
-                <a:cs typeface="Arial" pitchFamily="34" charset="-120"/>
-              </a:rPr>
-              <a:t>Week 1, that verse was a rebuke. Today it is a commission — because now you have the meal to serve.</a:t>
-            </a:r>
-            <a:endParaRPr lang="en-US" sz="1600" dirty="0"/>
+              <a:t>Week 1, that verse was a rebuke. Today it is a commission → because now you have the meal to serve.</a:t>
+            </a:r>
+            <a:endParaRPr lang="en-US" sz="2000" dirty="0"/>
           </a:p>
         </p:txBody>
       </p:sp>
@@ -3547,7 +3494,7 @@
         </p:nvSpPr>
         <p:spPr>
           <a:xfrm>
-            <a:off x="365760" y="5120640"/>
+            <a:off x="365760" y="5157891"/>
             <a:ext cx="8412480" cy="960120"/>
           </a:xfrm>
           <a:prstGeom prst="rect">
@@ -3560,11 +3507,11 @@
           <a:bodyPr wrap="square" lIns="0" tIns="0" rIns="0" bIns="0" rtlCol="0" anchor="t"/>
           <a:lstStyle/>
           <a:p>
-            <a:pPr algn="l" indent="0" marL="0">
+            <a:pPr marL="0" indent="0" algn="l">
               <a:buNone/>
             </a:pPr>
             <a:r>
-              <a:rPr lang="en-US" sz="1400" b="1" dirty="0">
+              <a:rPr lang="en-US" b="1" dirty="0">
                 <a:solidFill>
                   <a:srgbClr val="1F497D"/>
                 </a:solidFill>
@@ -3574,11 +3521,8 @@
               </a:rPr>
               <a:t>Notice the bookends of grace: </a:t>
             </a:r>
-            <a:pPr algn="l" indent="0" marL="0">
-              <a:buNone/>
-            </a:pPr>
-            <a:r>
-              <a:rPr lang="en-US" sz="1400" dirty="0">
+            <a:r>
+              <a:rPr lang="en-US" dirty="0">
                 <a:solidFill>
                   <a:srgbClr val="000000"/>
                 </a:solidFill>
@@ -3586,9 +3530,9 @@
                 <a:ea typeface="Arial" pitchFamily="34" charset="-122"/>
                 <a:cs typeface="Arial" pitchFamily="34" charset="-120"/>
               </a:rPr>
-              <a:t>the command to teach opens with “all authority is given to ME” and closes with “I am WITH you always.” You are sent under His authority and in His company — never on your own steam.</a:t>
-            </a:r>
-            <a:endParaRPr lang="en-US" sz="1600" dirty="0"/>
+              <a:t>the command to teach opens with “all authority is given to ME” and closes with “I am WITH you always.” You are sent under His authority and in His company → never on your own steam.</a:t>
+            </a:r>
+            <a:endParaRPr lang="en-US" sz="2000" dirty="0"/>
           </a:p>
         </p:txBody>
       </p:sp>
@@ -3606,26 +3550,26 @@
               <p:cTn id="2" dur="indefinite" nodeType="mainSeq">
                 <p:childTnLst>
                   <p:par>
-                    <p:cTn id="7" fill="hold">
+                    <p:cTn id="3" fill="hold">
                       <p:stCondLst>
                         <p:cond delay="indefinite"/>
                       </p:stCondLst>
                       <p:childTnLst>
                         <p:par>
-                          <p:cTn id="8" fill="hold">
+                          <p:cTn id="4" fill="hold">
                             <p:stCondLst>
                               <p:cond delay="0"/>
                             </p:stCondLst>
                             <p:childTnLst>
                               <p:par>
-                                <p:cTn id="3" presetID="42" presetClass="entr" presetSubtype="0" fill="hold" grpId="0" nodeType="clickEffect">
+                                <p:cTn id="5" presetID="42" presetClass="entr" presetSubtype="0" fill="hold" nodeType="clickEffect">
                                   <p:stCondLst>
                                     <p:cond delay="0"/>
                                   </p:stCondLst>
                                   <p:childTnLst>
                                     <p:set>
                                       <p:cBhvr>
-                                        <p:cTn id="4" dur="1" fill="hold">
+                                        <p:cTn id="6" dur="1" fill="hold">
                                           <p:stCondLst>
                                             <p:cond delay="0"/>
                                           </p:stCondLst>
@@ -3643,7 +3587,7 @@
                                     </p:set>
                                     <p:animEffect transition="in" filter="fade">
                                       <p:cBhvr>
-                                        <p:cTn id="5" dur="1000"/>
+                                        <p:cTn id="7" dur="1000"/>
                                         <p:tgtEl>
                                           <p:spTgt spid="4"/>
                                         </p:tgtEl>
@@ -3651,7 +3595,7 @@
                                     </p:animEffect>
                                     <p:anim calcmode="lin" valueType="num">
                                       <p:cBhvr>
-                                        <p:cTn id="6" dur="1000" fill="hold"/>
+                                        <p:cTn id="8" dur="1000" fill="hold"/>
                                         <p:tgtEl>
                                           <p:spTgt spid="4"/>
                                         </p:tgtEl>
@@ -3682,26 +3626,26 @@
                     </p:cTn>
                   </p:par>
                   <p:par>
-                    <p:cTn id="13" fill="hold">
+                    <p:cTn id="9" fill="hold">
                       <p:stCondLst>
                         <p:cond delay="indefinite"/>
                       </p:stCondLst>
                       <p:childTnLst>
                         <p:par>
-                          <p:cTn id="14" fill="hold">
+                          <p:cTn id="10" fill="hold">
                             <p:stCondLst>
                               <p:cond delay="0"/>
                             </p:stCondLst>
                             <p:childTnLst>
                               <p:par>
-                                <p:cTn id="9" presetID="42" presetClass="entr" presetSubtype="0" fill="hold" grpId="0" nodeType="clickEffect">
+                                <p:cTn id="11" presetID="42" presetClass="entr" presetSubtype="0" fill="hold" nodeType="clickEffect">
                                   <p:stCondLst>
                                     <p:cond delay="0"/>
                                   </p:stCondLst>
                                   <p:childTnLst>
                                     <p:set>
                                       <p:cBhvr>
-                                        <p:cTn id="10" dur="1" fill="hold">
+                                        <p:cTn id="12" dur="1" fill="hold">
                                           <p:stCondLst>
                                             <p:cond delay="0"/>
                                           </p:stCondLst>
@@ -3719,7 +3663,7 @@
                                     </p:set>
                                     <p:animEffect transition="in" filter="fade">
                                       <p:cBhvr>
-                                        <p:cTn id="11" dur="1000"/>
+                                        <p:cTn id="13" dur="1000"/>
                                         <p:tgtEl>
                                           <p:spTgt spid="5"/>
                                         </p:tgtEl>
@@ -3727,7 +3671,7 @@
                                     </p:animEffect>
                                     <p:anim calcmode="lin" valueType="num">
                                       <p:cBhvr>
-                                        <p:cTn id="12" dur="1000" fill="hold"/>
+                                        <p:cTn id="14" dur="1000" fill="hold"/>
                                         <p:tgtEl>
                                           <p:spTgt spid="5"/>
                                         </p:tgtEl>
@@ -3758,26 +3702,26 @@
                     </p:cTn>
                   </p:par>
                   <p:par>
-                    <p:cTn id="19" fill="hold">
+                    <p:cTn id="15" fill="hold">
                       <p:stCondLst>
                         <p:cond delay="indefinite"/>
                       </p:stCondLst>
                       <p:childTnLst>
                         <p:par>
-                          <p:cTn id="20" fill="hold">
+                          <p:cTn id="16" fill="hold">
                             <p:stCondLst>
                               <p:cond delay="0"/>
                             </p:stCondLst>
                             <p:childTnLst>
                               <p:par>
-                                <p:cTn id="15" presetID="42" presetClass="entr" presetSubtype="0" fill="hold" grpId="0" nodeType="clickEffect">
+                                <p:cTn id="17" presetID="42" presetClass="entr" presetSubtype="0" fill="hold" nodeType="clickEffect">
                                   <p:stCondLst>
                                     <p:cond delay="0"/>
                                   </p:stCondLst>
                                   <p:childTnLst>
                                     <p:set>
                                       <p:cBhvr>
-                                        <p:cTn id="16" dur="1" fill="hold">
+                                        <p:cTn id="18" dur="1" fill="hold">
                                           <p:stCondLst>
                                             <p:cond delay="0"/>
                                           </p:stCondLst>
@@ -3795,7 +3739,7 @@
                                     </p:set>
                                     <p:animEffect transition="in" filter="fade">
                                       <p:cBhvr>
-                                        <p:cTn id="17" dur="1000"/>
+                                        <p:cTn id="19" dur="1000"/>
                                         <p:tgtEl>
                                           <p:spTgt spid="6"/>
                                         </p:tgtEl>
@@ -3803,7 +3747,7 @@
                                     </p:animEffect>
                                     <p:anim calcmode="lin" valueType="num">
                                       <p:cBhvr>
-                                        <p:cTn id="18" dur="1000" fill="hold"/>
+                                        <p:cTn id="20" dur="1000" fill="hold"/>
                                         <p:tgtEl>
                                           <p:spTgt spid="6"/>
                                         </p:tgtEl>
@@ -3834,26 +3778,26 @@
                     </p:cTn>
                   </p:par>
                   <p:par>
-                    <p:cTn id="25" fill="hold">
+                    <p:cTn id="21" fill="hold">
                       <p:stCondLst>
                         <p:cond delay="indefinite"/>
                       </p:stCondLst>
                       <p:childTnLst>
                         <p:par>
-                          <p:cTn id="26" fill="hold">
+                          <p:cTn id="22" fill="hold">
                             <p:stCondLst>
                               <p:cond delay="0"/>
                             </p:stCondLst>
                             <p:childTnLst>
                               <p:par>
-                                <p:cTn id="21" presetID="42" presetClass="entr" presetSubtype="0" fill="hold" grpId="0" nodeType="clickEffect">
+                                <p:cTn id="23" presetID="42" presetClass="entr" presetSubtype="0" fill="hold" nodeType="clickEffect">
                                   <p:stCondLst>
                                     <p:cond delay="0"/>
                                   </p:stCondLst>
                                   <p:childTnLst>
                                     <p:set>
                                       <p:cBhvr>
-                                        <p:cTn id="22" dur="1" fill="hold">
+                                        <p:cTn id="24" dur="1" fill="hold">
                                           <p:stCondLst>
                                             <p:cond delay="0"/>
                                           </p:stCondLst>
@@ -3871,7 +3815,7 @@
                                     </p:set>
                                     <p:animEffect transition="in" filter="fade">
                                       <p:cBhvr>
-                                        <p:cTn id="23" dur="1000"/>
+                                        <p:cTn id="25" dur="1000"/>
                                         <p:tgtEl>
                                           <p:spTgt spid="7"/>
                                         </p:tgtEl>
@@ -3879,7 +3823,7 @@
                                     </p:animEffect>
                                     <p:anim calcmode="lin" valueType="num">
                                       <p:cBhvr>
-                                        <p:cTn id="24" dur="1000" fill="hold"/>
+                                        <p:cTn id="26" dur="1000" fill="hold"/>
                                         <p:tgtEl>
                                           <p:spTgt spid="7"/>
                                         </p:tgtEl>
@@ -3972,7 +3916,7 @@
           <a:bodyPr wrap="square" lIns="0" tIns="0" rIns="0" bIns="0" rtlCol="0" anchor="t"/>
           <a:lstStyle/>
           <a:p>
-            <a:pPr algn="l" indent="0" marL="0">
+            <a:pPr marL="0" indent="0" algn="l">
               <a:buNone/>
             </a:pPr>
             <a:r>
@@ -4011,11 +3955,11 @@
           <a:bodyPr wrap="square" lIns="0" tIns="0" rIns="0" bIns="0" rtlCol="0" anchor="t"/>
           <a:lstStyle/>
           <a:p>
-            <a:pPr algn="l" indent="0" marL="0">
+            <a:pPr marL="0" indent="0" algn="l">
               <a:buNone/>
             </a:pPr>
             <a:r>
-              <a:rPr lang="en-US" sz="1300" b="1" dirty="0">
+              <a:rPr lang="en-US" sz="2000" b="1" dirty="0">
                 <a:solidFill>
                   <a:srgbClr val="4F81BD"/>
                 </a:solidFill>
@@ -4025,7 +3969,7 @@
               </a:rPr>
               <a:t>Everything asked in twelve weeks rests on this</a:t>
             </a:r>
-            <a:endParaRPr lang="en-US" sz="1600" dirty="0"/>
+            <a:endParaRPr lang="en-US" sz="2800" dirty="0"/>
           </a:p>
         </p:txBody>
       </p:sp>
@@ -4050,11 +3994,11 @@
           <a:bodyPr wrap="square" lIns="0" tIns="0" rIns="0" bIns="0" rtlCol="0" anchor="t"/>
           <a:lstStyle/>
           <a:p>
-            <a:pPr algn="l" indent="0" marL="0">
+            <a:pPr marL="0" indent="0" algn="l">
               <a:buNone/>
             </a:pPr>
             <a:r>
-              <a:rPr lang="en-US" sz="1450" b="1" i="1" dirty="0">
+              <a:rPr lang="en-US" sz="2000" b="1" i="1" dirty="0">
                 <a:solidFill>
                   <a:srgbClr val="000000"/>
                 </a:solidFill>
@@ -4064,11 +4008,8 @@
               </a:rPr>
               <a:t>“a body you prepared for me… “Here I am: I have come… to do your will, O God.”… by his will we have been made holy through the offering of the body of Jesus Christ once for all.” </a:t>
             </a:r>
-            <a:pPr algn="l" indent="0" marL="0">
-              <a:buNone/>
-            </a:pPr>
-            <a:r>
-              <a:rPr lang="en-US" sz="1350" b="1" dirty="0">
+            <a:r>
+              <a:rPr lang="en-US" b="1" dirty="0">
                 <a:solidFill>
                   <a:srgbClr val="000000"/>
                 </a:solidFill>
@@ -4078,7 +4019,7 @@
               </a:rPr>
               <a:t>(Hebrews 10:5, 7, 10)</a:t>
             </a:r>
-            <a:endParaRPr lang="en-US" sz="1600" dirty="0"/>
+            <a:endParaRPr lang="en-US" sz="2400" dirty="0"/>
           </a:p>
         </p:txBody>
       </p:sp>
@@ -4090,7 +4031,7 @@
         </p:nvSpPr>
         <p:spPr>
           <a:xfrm>
-            <a:off x="548640" y="4892040"/>
+            <a:off x="430106" y="4341707"/>
             <a:ext cx="4846320" cy="566928"/>
           </a:xfrm>
           <a:prstGeom prst="roundRect">
@@ -4108,6 +4049,13 @@
             <a:prstDash val="solid"/>
           </a:ln>
         </p:spPr>
+        <p:txBody>
+          <a:bodyPr/>
+          <a:lstStyle/>
+          <a:p>
+            <a:endParaRPr lang="en-US" sz="2800"/>
+          </a:p>
+        </p:txBody>
       </p:sp>
       <p:sp>
         <p:nvSpPr>
@@ -4117,7 +4065,7 @@
         </p:nvSpPr>
         <p:spPr>
           <a:xfrm>
-            <a:off x="713232" y="4965192"/>
+            <a:off x="594698" y="4414859"/>
             <a:ext cx="4572000" cy="438912"/>
           </a:xfrm>
           <a:prstGeom prst="rect">
@@ -4130,11 +4078,11 @@
           <a:bodyPr wrap="square" lIns="0" tIns="0" rIns="0" bIns="0" rtlCol="0" anchor="ctr"/>
           <a:lstStyle/>
           <a:p>
-            <a:pPr algn="l" indent="0" marL="0">
+            <a:pPr marL="0" indent="0" algn="l">
               <a:buNone/>
             </a:pPr>
             <a:r>
-              <a:rPr lang="en-US" sz="1250" b="1" dirty="0">
+              <a:rPr lang="en-US" b="1" dirty="0">
                 <a:solidFill>
                   <a:srgbClr val="FFFFFF"/>
                 </a:solidFill>
@@ -4142,9 +4090,31 @@
                 <a:ea typeface="Arial" pitchFamily="34" charset="-122"/>
                 <a:cs typeface="Arial" pitchFamily="34" charset="-120"/>
               </a:rPr>
-              <a:t>Religion — perfect form</a:t>
-            </a:r>
-            <a:endParaRPr lang="en-US" sz="1600" dirty="0"/>
+              <a:t>Religion </a:t>
+            </a:r>
+            <a:r>
+              <a:rPr lang="en-US" b="1">
+                <a:solidFill>
+                  <a:srgbClr val="FFFFFF"/>
+                </a:solidFill>
+                <a:latin typeface="Arial" pitchFamily="34" charset="0"/>
+                <a:ea typeface="Arial" pitchFamily="34" charset="-122"/>
+                <a:cs typeface="Arial" pitchFamily="34" charset="-120"/>
+              </a:rPr>
+              <a:t>→</a:t>
+            </a:r>
+            <a:r>
+              <a:rPr lang="en-US" b="1" dirty="0">
+                <a:solidFill>
+                  <a:srgbClr val="FFFFFF"/>
+                </a:solidFill>
+                <a:latin typeface="Arial" pitchFamily="34" charset="0"/>
+                <a:ea typeface="Arial" pitchFamily="34" charset="-122"/>
+                <a:cs typeface="Arial" pitchFamily="34" charset="-120"/>
+              </a:rPr>
+              <a:t> perfect form</a:t>
+            </a:r>
+            <a:endParaRPr lang="en-US" sz="2400" dirty="0"/>
           </a:p>
         </p:txBody>
       </p:sp>
@@ -4156,7 +4126,7 @@
         </p:nvSpPr>
         <p:spPr>
           <a:xfrm>
-            <a:off x="548640" y="4233672"/>
+            <a:off x="430106" y="3683339"/>
             <a:ext cx="4846320" cy="566928"/>
           </a:xfrm>
           <a:prstGeom prst="roundRect">
@@ -4176,6 +4146,13 @@
             <a:prstDash val="solid"/>
           </a:ln>
         </p:spPr>
+        <p:txBody>
+          <a:bodyPr/>
+          <a:lstStyle/>
+          <a:p>
+            <a:endParaRPr lang="en-US" sz="2800"/>
+          </a:p>
+        </p:txBody>
       </p:sp>
       <p:sp>
         <p:nvSpPr>
@@ -4185,7 +4162,7 @@
         </p:nvSpPr>
         <p:spPr>
           <a:xfrm>
-            <a:off x="713232" y="4306824"/>
+            <a:off x="594698" y="3756491"/>
             <a:ext cx="4572000" cy="438912"/>
           </a:xfrm>
           <a:prstGeom prst="rect">
@@ -4198,11 +4175,11 @@
           <a:bodyPr wrap="square" lIns="0" tIns="0" rIns="0" bIns="0" rtlCol="0" anchor="ctr"/>
           <a:lstStyle/>
           <a:p>
-            <a:pPr algn="l" indent="0" marL="0">
+            <a:pPr marL="0" indent="0" algn="l">
               <a:buNone/>
             </a:pPr>
             <a:r>
-              <a:rPr lang="en-US" sz="1250" b="1" dirty="0">
+              <a:rPr lang="en-US" b="1" dirty="0">
                 <a:solidFill>
                   <a:srgbClr val="FFFFFF"/>
                 </a:solidFill>
@@ -4210,9 +4187,31 @@
                 <a:ea typeface="Arial" pitchFamily="34" charset="-122"/>
                 <a:cs typeface="Arial" pitchFamily="34" charset="-120"/>
               </a:rPr>
-              <a:t>Worship — perfect heart</a:t>
-            </a:r>
-            <a:endParaRPr lang="en-US" sz="1600" dirty="0"/>
+              <a:t>Worship </a:t>
+            </a:r>
+            <a:r>
+              <a:rPr lang="en-US" b="1">
+                <a:solidFill>
+                  <a:srgbClr val="FFFFFF"/>
+                </a:solidFill>
+                <a:latin typeface="Arial" pitchFamily="34" charset="0"/>
+                <a:ea typeface="Arial" pitchFamily="34" charset="-122"/>
+                <a:cs typeface="Arial" pitchFamily="34" charset="-120"/>
+              </a:rPr>
+              <a:t>→</a:t>
+            </a:r>
+            <a:r>
+              <a:rPr lang="en-US" b="1" dirty="0">
+                <a:solidFill>
+                  <a:srgbClr val="FFFFFF"/>
+                </a:solidFill>
+                <a:latin typeface="Arial" pitchFamily="34" charset="0"/>
+                <a:ea typeface="Arial" pitchFamily="34" charset="-122"/>
+                <a:cs typeface="Arial" pitchFamily="34" charset="-120"/>
+              </a:rPr>
+              <a:t> perfect heart</a:t>
+            </a:r>
+            <a:endParaRPr lang="en-US" sz="2400" dirty="0"/>
           </a:p>
         </p:txBody>
       </p:sp>
@@ -4224,7 +4223,7 @@
         </p:nvSpPr>
         <p:spPr>
           <a:xfrm>
-            <a:off x="548640" y="3575304"/>
+            <a:off x="430106" y="3024971"/>
             <a:ext cx="4846320" cy="566928"/>
           </a:xfrm>
           <a:prstGeom prst="roundRect">
@@ -4244,6 +4243,13 @@
             <a:prstDash val="solid"/>
           </a:ln>
         </p:spPr>
+        <p:txBody>
+          <a:bodyPr/>
+          <a:lstStyle/>
+          <a:p>
+            <a:endParaRPr lang="en-US" sz="2800"/>
+          </a:p>
+        </p:txBody>
       </p:sp>
       <p:sp>
         <p:nvSpPr>
@@ -4253,7 +4259,7 @@
         </p:nvSpPr>
         <p:spPr>
           <a:xfrm>
-            <a:off x="713232" y="3648456"/>
+            <a:off x="594698" y="3098123"/>
             <a:ext cx="4572000" cy="438912"/>
           </a:xfrm>
           <a:prstGeom prst="rect">
@@ -4266,11 +4272,11 @@
           <a:bodyPr wrap="square" lIns="0" tIns="0" rIns="0" bIns="0" rtlCol="0" anchor="ctr"/>
           <a:lstStyle/>
           <a:p>
-            <a:pPr algn="l" indent="0" marL="0">
+            <a:pPr marL="0" indent="0" algn="l">
               <a:buNone/>
             </a:pPr>
             <a:r>
-              <a:rPr lang="en-US" sz="1250" b="1" dirty="0">
+              <a:rPr lang="en-US" b="1" dirty="0">
                 <a:solidFill>
                   <a:srgbClr val="FFFFFF"/>
                 </a:solidFill>
@@ -4278,9 +4284,31 @@
                 <a:ea typeface="Arial" pitchFamily="34" charset="-122"/>
                 <a:cs typeface="Arial" pitchFamily="34" charset="-120"/>
               </a:rPr>
-              <a:t>Sacrifice — the full cost, nothing kept back</a:t>
-            </a:r>
-            <a:endParaRPr lang="en-US" sz="1600" dirty="0"/>
+              <a:t>Sacrifice </a:t>
+            </a:r>
+            <a:r>
+              <a:rPr lang="en-US" b="1">
+                <a:solidFill>
+                  <a:srgbClr val="FFFFFF"/>
+                </a:solidFill>
+                <a:latin typeface="Arial" pitchFamily="34" charset="0"/>
+                <a:ea typeface="Arial" pitchFamily="34" charset="-122"/>
+                <a:cs typeface="Arial" pitchFamily="34" charset="-120"/>
+              </a:rPr>
+              <a:t>→</a:t>
+            </a:r>
+            <a:r>
+              <a:rPr lang="en-US" b="1" dirty="0">
+                <a:solidFill>
+                  <a:srgbClr val="FFFFFF"/>
+                </a:solidFill>
+                <a:latin typeface="Arial" pitchFamily="34" charset="0"/>
+                <a:ea typeface="Arial" pitchFamily="34" charset="-122"/>
+                <a:cs typeface="Arial" pitchFamily="34" charset="-120"/>
+              </a:rPr>
+              <a:t> the full cost, nothing kept back</a:t>
+            </a:r>
+            <a:endParaRPr lang="en-US" sz="2400" dirty="0"/>
           </a:p>
         </p:txBody>
       </p:sp>
@@ -4292,7 +4320,7 @@
         </p:nvSpPr>
         <p:spPr>
           <a:xfrm>
-            <a:off x="548640" y="2916936"/>
+            <a:off x="430106" y="2366603"/>
             <a:ext cx="4846320" cy="566928"/>
           </a:xfrm>
           <a:prstGeom prst="roundRect">
@@ -4312,6 +4340,13 @@
             <a:prstDash val="solid"/>
           </a:ln>
         </p:spPr>
+        <p:txBody>
+          <a:bodyPr/>
+          <a:lstStyle/>
+          <a:p>
+            <a:endParaRPr lang="en-US" sz="2800"/>
+          </a:p>
+        </p:txBody>
       </p:sp>
       <p:sp>
         <p:nvSpPr>
@@ -4321,7 +4356,7 @@
         </p:nvSpPr>
         <p:spPr>
           <a:xfrm>
-            <a:off x="713232" y="2990088"/>
+            <a:off x="594698" y="2439755"/>
             <a:ext cx="4572000" cy="438912"/>
           </a:xfrm>
           <a:prstGeom prst="rect">
@@ -4334,11 +4369,11 @@
           <a:bodyPr wrap="square" lIns="0" tIns="0" rIns="0" bIns="0" rtlCol="0" anchor="ctr"/>
           <a:lstStyle/>
           <a:p>
-            <a:pPr algn="l" indent="0" marL="0">
+            <a:pPr marL="0" indent="0" algn="l">
               <a:buNone/>
             </a:pPr>
             <a:r>
-              <a:rPr lang="en-US" sz="1250" b="1" dirty="0">
+              <a:rPr lang="en-US" b="1" dirty="0">
                 <a:solidFill>
                   <a:srgbClr val="FFFFFF"/>
                 </a:solidFill>
@@ -4346,9 +4381,31 @@
                 <a:ea typeface="Arial" pitchFamily="34" charset="-122"/>
                 <a:cs typeface="Arial" pitchFamily="34" charset="-120"/>
               </a:rPr>
-              <a:t>Obedience of Faith — “I have come to do your will”</a:t>
-            </a:r>
-            <a:endParaRPr lang="en-US" sz="1600" dirty="0"/>
+              <a:t>Obedience of Faith </a:t>
+            </a:r>
+            <a:r>
+              <a:rPr lang="en-US" b="1">
+                <a:solidFill>
+                  <a:srgbClr val="FFFFFF"/>
+                </a:solidFill>
+                <a:latin typeface="Arial" pitchFamily="34" charset="0"/>
+                <a:ea typeface="Arial" pitchFamily="34" charset="-122"/>
+                <a:cs typeface="Arial" pitchFamily="34" charset="-120"/>
+              </a:rPr>
+              <a:t>→</a:t>
+            </a:r>
+            <a:r>
+              <a:rPr lang="en-US" b="1" dirty="0">
+                <a:solidFill>
+                  <a:srgbClr val="FFFFFF"/>
+                </a:solidFill>
+                <a:latin typeface="Arial" pitchFamily="34" charset="0"/>
+                <a:ea typeface="Arial" pitchFamily="34" charset="-122"/>
+                <a:cs typeface="Arial" pitchFamily="34" charset="-120"/>
+              </a:rPr>
+              <a:t> “I have come to do your will”</a:t>
+            </a:r>
+            <a:endParaRPr lang="en-US" sz="2400" dirty="0"/>
           </a:p>
         </p:txBody>
       </p:sp>
@@ -4360,8 +4417,8 @@
         </p:nvSpPr>
         <p:spPr>
           <a:xfrm>
-            <a:off x="5623560" y="2286000"/>
-            <a:ext cx="3200400" cy="3200400"/>
+            <a:off x="5577840" y="2366603"/>
+            <a:ext cx="3200400" cy="3733800"/>
           </a:xfrm>
           <a:prstGeom prst="rect">
             <a:avLst/>
@@ -4373,11 +4430,11 @@
           <a:bodyPr wrap="square" lIns="0" tIns="0" rIns="0" bIns="0" rtlCol="0" anchor="t"/>
           <a:lstStyle/>
           <a:p>
-            <a:pPr algn="l" indent="0" marL="0">
+            <a:pPr marL="0" indent="0" algn="l">
               <a:buNone/>
             </a:pPr>
             <a:r>
-              <a:rPr lang="en-US" sz="1600" b="1" dirty="0">
+              <a:rPr lang="en-US" b="1" dirty="0">
                 <a:solidFill>
                   <a:srgbClr val="1F497D"/>
                 </a:solidFill>
@@ -4388,11 +4445,8 @@
               <a:t>Aligned once, completely, in Him.
 </a:t>
             </a:r>
-            <a:pPr algn="l" indent="0" marL="0">
-              <a:buNone/>
-            </a:pPr>
-            <a:r>
-              <a:rPr lang="en-US" sz="1300" dirty="0">
+            <a:r>
+              <a:rPr lang="en-US" sz="1600" dirty="0">
                 <a:solidFill>
                   <a:srgbClr val="000000"/>
                 </a:solidFill>
@@ -4400,29 +4454,23 @@
                 <a:ea typeface="Arial" pitchFamily="34" charset="-122"/>
                 <a:cs typeface="Arial" pitchFamily="34" charset="-120"/>
               </a:rPr>
-              <a:t>The four layers we stacked in Week 2 — form, disposition, cost, settled pattern — were held perfectly by Christ, once for all.
+              <a:t>The four layers we stacked in Week 2 → form, disposition, cost, settled pattern → were held perfectly by Christ, once for all.
+He completed the stack before He asked you to climb it. Your sacrifice is a thank offering, never a payment.</a:t>
+            </a:r>
+            <a:r>
+              <a:rPr lang="en-US" sz="1400" dirty="0">
+                <a:solidFill>
+                  <a:srgbClr val="000000"/>
+                </a:solidFill>
+                <a:latin typeface="Arial" pitchFamily="34" charset="0"/>
+                <a:ea typeface="Arial" pitchFamily="34" charset="-122"/>
+                <a:cs typeface="Arial" pitchFamily="34" charset="-120"/>
+              </a:rPr>
+              <a:t>
 </a:t>
             </a:r>
-            <a:pPr algn="l" indent="0" marL="0">
-              <a:buNone/>
-            </a:pPr>
-            <a:r>
-              <a:rPr lang="en-US" sz="1300" dirty="0">
-                <a:solidFill>
-                  <a:srgbClr val="000000"/>
-                </a:solidFill>
-                <a:latin typeface="Arial" pitchFamily="34" charset="0"/>
-                <a:ea typeface="Arial" pitchFamily="34" charset="-122"/>
-                <a:cs typeface="Arial" pitchFamily="34" charset="-120"/>
-              </a:rPr>
-              <a:t>He completed the stack before He asked you to climb it. Your sacrifice is a thank offering, never a payment.
-</a:t>
-            </a:r>
-            <a:pPr algn="l" indent="0" marL="0">
-              <a:buNone/>
-            </a:pPr>
-            <a:r>
-              <a:rPr lang="en-US" sz="1500" b="1" u="sng" dirty="0">
+            <a:r>
+              <a:rPr lang="en-US" sz="1600" b="1" u="sng" dirty="0">
                 <a:solidFill>
                   <a:srgbClr val="1F497D"/>
                 </a:solidFill>
@@ -4432,7 +4480,7 @@
               </a:rPr>
               <a:t>Mercy first. Altar second.</a:t>
             </a:r>
-            <a:endParaRPr lang="en-US" sz="1600" dirty="0"/>
+            <a:endParaRPr lang="en-US" dirty="0"/>
           </a:p>
         </p:txBody>
       </p:sp>
@@ -4450,26 +4498,26 @@
               <p:cTn id="2" dur="indefinite" nodeType="mainSeq">
                 <p:childTnLst>
                   <p:par>
-                    <p:cTn id="7" fill="hold">
+                    <p:cTn id="3" fill="hold">
                       <p:stCondLst>
                         <p:cond delay="indefinite"/>
                       </p:stCondLst>
                       <p:childTnLst>
                         <p:par>
-                          <p:cTn id="8" fill="hold">
+                          <p:cTn id="4" fill="hold">
                             <p:stCondLst>
                               <p:cond delay="0"/>
                             </p:stCondLst>
                             <p:childTnLst>
                               <p:par>
-                                <p:cTn id="3" presetID="42" presetClass="entr" presetSubtype="0" fill="hold" grpId="0" nodeType="clickEffect">
+                                <p:cTn id="5" presetID="42" presetClass="entr" presetSubtype="0" fill="hold" nodeType="clickEffect">
                                   <p:stCondLst>
                                     <p:cond delay="0"/>
                                   </p:stCondLst>
                                   <p:childTnLst>
                                     <p:set>
                                       <p:cBhvr>
-                                        <p:cTn id="4" dur="1" fill="hold">
+                                        <p:cTn id="6" dur="1" fill="hold">
                                           <p:stCondLst>
                                             <p:cond delay="0"/>
                                           </p:stCondLst>
@@ -4487,7 +4535,7 @@
                                     </p:set>
                                     <p:animEffect transition="in" filter="fade">
                                       <p:cBhvr>
-                                        <p:cTn id="5" dur="1000"/>
+                                        <p:cTn id="7" dur="1000"/>
                                         <p:tgtEl>
                                           <p:spTgt spid="4"/>
                                         </p:tgtEl>
@@ -4495,7 +4543,7 @@
                                     </p:animEffect>
                                     <p:anim calcmode="lin" valueType="num">
                                       <p:cBhvr>
-                                        <p:cTn id="6" dur="1000" fill="hold"/>
+                                        <p:cTn id="8" dur="1000" fill="hold"/>
                                         <p:tgtEl>
                                           <p:spTgt spid="4"/>
                                         </p:tgtEl>
@@ -4526,26 +4574,26 @@
                     </p:cTn>
                   </p:par>
                   <p:par>
-                    <p:cTn id="17" fill="hold">
+                    <p:cTn id="9" fill="hold">
                       <p:stCondLst>
                         <p:cond delay="indefinite"/>
                       </p:stCondLst>
                       <p:childTnLst>
                         <p:par>
-                          <p:cTn id="18" fill="hold">
+                          <p:cTn id="10" fill="hold">
                             <p:stCondLst>
                               <p:cond delay="0"/>
                             </p:stCondLst>
                             <p:childTnLst>
                               <p:par>
-                                <p:cTn id="9" presetID="42" presetClass="entr" presetSubtype="0" fill="hold" grpId="0" nodeType="clickEffect">
+                                <p:cTn id="11" presetID="42" presetClass="entr" presetSubtype="0" fill="hold" nodeType="clickEffect">
                                   <p:stCondLst>
                                     <p:cond delay="0"/>
                                   </p:stCondLst>
                                   <p:childTnLst>
                                     <p:set>
                                       <p:cBhvr>
-                                        <p:cTn id="10" dur="1" fill="hold">
+                                        <p:cTn id="12" dur="1" fill="hold">
                                           <p:stCondLst>
                                             <p:cond delay="0"/>
                                           </p:stCondLst>
@@ -4563,7 +4611,7 @@
                                     </p:set>
                                     <p:animEffect transition="in" filter="fade">
                                       <p:cBhvr>
-                                        <p:cTn id="11" dur="1000"/>
+                                        <p:cTn id="13" dur="1000"/>
                                         <p:tgtEl>
                                           <p:spTgt spid="5"/>
                                         </p:tgtEl>
@@ -4571,7 +4619,7 @@
                                     </p:animEffect>
                                     <p:anim calcmode="lin" valueType="num">
                                       <p:cBhvr>
-                                        <p:cTn id="12" dur="1000" fill="hold"/>
+                                        <p:cTn id="14" dur="1000" fill="hold"/>
                                         <p:tgtEl>
                                           <p:spTgt spid="5"/>
                                         </p:tgtEl>
@@ -4596,14 +4644,14 @@
                                 </p:cTn>
                               </p:par>
                               <p:par>
-                                <p:cTn id="13" presetID="42" presetClass="entr" presetSubtype="0" fill="hold" grpId="0" nodeType="withEffect">
+                                <p:cTn id="15" presetID="42" presetClass="entr" presetSubtype="0" fill="hold" nodeType="withEffect">
                                   <p:stCondLst>
                                     <p:cond delay="0"/>
                                   </p:stCondLst>
                                   <p:childTnLst>
                                     <p:set>
                                       <p:cBhvr>
-                                        <p:cTn id="14" dur="1" fill="hold">
+                                        <p:cTn id="16" dur="1" fill="hold">
                                           <p:stCondLst>
                                             <p:cond delay="0"/>
                                           </p:stCondLst>
@@ -4621,7 +4669,7 @@
                                     </p:set>
                                     <p:animEffect transition="in" filter="fade">
                                       <p:cBhvr>
-                                        <p:cTn id="15" dur="1000"/>
+                                        <p:cTn id="17" dur="1000"/>
                                         <p:tgtEl>
                                           <p:spTgt spid="6"/>
                                         </p:tgtEl>
@@ -4629,7 +4677,7 @@
                                     </p:animEffect>
                                     <p:anim calcmode="lin" valueType="num">
                                       <p:cBhvr>
-                                        <p:cTn id="16" dur="1000" fill="hold"/>
+                                        <p:cTn id="18" dur="1000" fill="hold"/>
                                         <p:tgtEl>
                                           <p:spTgt spid="6"/>
                                         </p:tgtEl>
@@ -4660,26 +4708,26 @@
                     </p:cTn>
                   </p:par>
                   <p:par>
-                    <p:cTn id="27" fill="hold">
+                    <p:cTn id="19" fill="hold">
                       <p:stCondLst>
                         <p:cond delay="indefinite"/>
                       </p:stCondLst>
                       <p:childTnLst>
                         <p:par>
-                          <p:cTn id="28" fill="hold">
+                          <p:cTn id="20" fill="hold">
                             <p:stCondLst>
                               <p:cond delay="0"/>
                             </p:stCondLst>
                             <p:childTnLst>
                               <p:par>
-                                <p:cTn id="19" presetID="42" presetClass="entr" presetSubtype="0" fill="hold" grpId="0" nodeType="clickEffect">
+                                <p:cTn id="21" presetID="42" presetClass="entr" presetSubtype="0" fill="hold" nodeType="clickEffect">
                                   <p:stCondLst>
                                     <p:cond delay="0"/>
                                   </p:stCondLst>
                                   <p:childTnLst>
                                     <p:set>
                                       <p:cBhvr>
-                                        <p:cTn id="20" dur="1" fill="hold">
+                                        <p:cTn id="22" dur="1" fill="hold">
                                           <p:stCondLst>
                                             <p:cond delay="0"/>
                                           </p:stCondLst>
@@ -4697,7 +4745,7 @@
                                     </p:set>
                                     <p:animEffect transition="in" filter="fade">
                                       <p:cBhvr>
-                                        <p:cTn id="21" dur="1000"/>
+                                        <p:cTn id="23" dur="1000"/>
                                         <p:tgtEl>
                                           <p:spTgt spid="7"/>
                                         </p:tgtEl>
@@ -4705,7 +4753,7 @@
                                     </p:animEffect>
                                     <p:anim calcmode="lin" valueType="num">
                                       <p:cBhvr>
-                                        <p:cTn id="22" dur="1000" fill="hold"/>
+                                        <p:cTn id="24" dur="1000" fill="hold"/>
                                         <p:tgtEl>
                                           <p:spTgt spid="7"/>
                                         </p:tgtEl>
@@ -4730,14 +4778,14 @@
                                 </p:cTn>
                               </p:par>
                               <p:par>
-                                <p:cTn id="23" presetID="42" presetClass="entr" presetSubtype="0" fill="hold" grpId="0" nodeType="withEffect">
+                                <p:cTn id="25" presetID="42" presetClass="entr" presetSubtype="0" fill="hold" nodeType="withEffect">
                                   <p:stCondLst>
                                     <p:cond delay="0"/>
                                   </p:stCondLst>
                                   <p:childTnLst>
                                     <p:set>
                                       <p:cBhvr>
-                                        <p:cTn id="24" dur="1" fill="hold">
+                                        <p:cTn id="26" dur="1" fill="hold">
                                           <p:stCondLst>
                                             <p:cond delay="0"/>
                                           </p:stCondLst>
@@ -4755,7 +4803,7 @@
                                     </p:set>
                                     <p:animEffect transition="in" filter="fade">
                                       <p:cBhvr>
-                                        <p:cTn id="25" dur="1000"/>
+                                        <p:cTn id="27" dur="1000"/>
                                         <p:tgtEl>
                                           <p:spTgt spid="8"/>
                                         </p:tgtEl>
@@ -4763,7 +4811,7 @@
                                     </p:animEffect>
                                     <p:anim calcmode="lin" valueType="num">
                                       <p:cBhvr>
-                                        <p:cTn id="26" dur="1000" fill="hold"/>
+                                        <p:cTn id="28" dur="1000" fill="hold"/>
                                         <p:tgtEl>
                                           <p:spTgt spid="8"/>
                                         </p:tgtEl>
@@ -4794,26 +4842,26 @@
                     </p:cTn>
                   </p:par>
                   <p:par>
-                    <p:cTn id="37" fill="hold">
+                    <p:cTn id="29" fill="hold">
                       <p:stCondLst>
                         <p:cond delay="indefinite"/>
                       </p:stCondLst>
                       <p:childTnLst>
                         <p:par>
-                          <p:cTn id="38" fill="hold">
+                          <p:cTn id="30" fill="hold">
                             <p:stCondLst>
                               <p:cond delay="0"/>
                             </p:stCondLst>
                             <p:childTnLst>
                               <p:par>
-                                <p:cTn id="29" presetID="42" presetClass="entr" presetSubtype="0" fill="hold" grpId="0" nodeType="clickEffect">
+                                <p:cTn id="31" presetID="42" presetClass="entr" presetSubtype="0" fill="hold" nodeType="clickEffect">
                                   <p:stCondLst>
                                     <p:cond delay="0"/>
                                   </p:stCondLst>
                                   <p:childTnLst>
                                     <p:set>
                                       <p:cBhvr>
-                                        <p:cTn id="30" dur="1" fill="hold">
+                                        <p:cTn id="32" dur="1" fill="hold">
                                           <p:stCondLst>
                                             <p:cond delay="0"/>
                                           </p:stCondLst>
@@ -4831,7 +4879,7 @@
                                     </p:set>
                                     <p:animEffect transition="in" filter="fade">
                                       <p:cBhvr>
-                                        <p:cTn id="31" dur="1000"/>
+                                        <p:cTn id="33" dur="1000"/>
                                         <p:tgtEl>
                                           <p:spTgt spid="9"/>
                                         </p:tgtEl>
@@ -4839,7 +4887,7 @@
                                     </p:animEffect>
                                     <p:anim calcmode="lin" valueType="num">
                                       <p:cBhvr>
-                                        <p:cTn id="32" dur="1000" fill="hold"/>
+                                        <p:cTn id="34" dur="1000" fill="hold"/>
                                         <p:tgtEl>
                                           <p:spTgt spid="9"/>
                                         </p:tgtEl>
@@ -4864,14 +4912,14 @@
                                 </p:cTn>
                               </p:par>
                               <p:par>
-                                <p:cTn id="33" presetID="42" presetClass="entr" presetSubtype="0" fill="hold" grpId="0" nodeType="withEffect">
+                                <p:cTn id="35" presetID="42" presetClass="entr" presetSubtype="0" fill="hold" nodeType="withEffect">
                                   <p:stCondLst>
                                     <p:cond delay="0"/>
                                   </p:stCondLst>
                                   <p:childTnLst>
                                     <p:set>
                                       <p:cBhvr>
-                                        <p:cTn id="34" dur="1" fill="hold">
+                                        <p:cTn id="36" dur="1" fill="hold">
                                           <p:stCondLst>
                                             <p:cond delay="0"/>
                                           </p:stCondLst>
@@ -4889,7 +4937,7 @@
                                     </p:set>
                                     <p:animEffect transition="in" filter="fade">
                                       <p:cBhvr>
-                                        <p:cTn id="35" dur="1000"/>
+                                        <p:cTn id="37" dur="1000"/>
                                         <p:tgtEl>
                                           <p:spTgt spid="10"/>
                                         </p:tgtEl>
@@ -4897,7 +4945,7 @@
                                     </p:animEffect>
                                     <p:anim calcmode="lin" valueType="num">
                                       <p:cBhvr>
-                                        <p:cTn id="36" dur="1000" fill="hold"/>
+                                        <p:cTn id="38" dur="1000" fill="hold"/>
                                         <p:tgtEl>
                                           <p:spTgt spid="10"/>
                                         </p:tgtEl>
@@ -4928,26 +4976,26 @@
                     </p:cTn>
                   </p:par>
                   <p:par>
-                    <p:cTn id="47" fill="hold">
+                    <p:cTn id="39" fill="hold">
                       <p:stCondLst>
                         <p:cond delay="indefinite"/>
                       </p:stCondLst>
                       <p:childTnLst>
                         <p:par>
-                          <p:cTn id="48" fill="hold">
+                          <p:cTn id="40" fill="hold">
                             <p:stCondLst>
                               <p:cond delay="0"/>
                             </p:stCondLst>
                             <p:childTnLst>
                               <p:par>
-                                <p:cTn id="39" presetID="42" presetClass="entr" presetSubtype="0" fill="hold" grpId="0" nodeType="clickEffect">
+                                <p:cTn id="41" presetID="42" presetClass="entr" presetSubtype="0" fill="hold" nodeType="clickEffect">
                                   <p:stCondLst>
                                     <p:cond delay="0"/>
                                   </p:stCondLst>
                                   <p:childTnLst>
                                     <p:set>
                                       <p:cBhvr>
-                                        <p:cTn id="40" dur="1" fill="hold">
+                                        <p:cTn id="42" dur="1" fill="hold">
                                           <p:stCondLst>
                                             <p:cond delay="0"/>
                                           </p:stCondLst>
@@ -4965,7 +5013,7 @@
                                     </p:set>
                                     <p:animEffect transition="in" filter="fade">
                                       <p:cBhvr>
-                                        <p:cTn id="41" dur="1000"/>
+                                        <p:cTn id="43" dur="1000"/>
                                         <p:tgtEl>
                                           <p:spTgt spid="11"/>
                                         </p:tgtEl>
@@ -4973,7 +5021,7 @@
                                     </p:animEffect>
                                     <p:anim calcmode="lin" valueType="num">
                                       <p:cBhvr>
-                                        <p:cTn id="42" dur="1000" fill="hold"/>
+                                        <p:cTn id="44" dur="1000" fill="hold"/>
                                         <p:tgtEl>
                                           <p:spTgt spid="11"/>
                                         </p:tgtEl>
@@ -4998,14 +5046,14 @@
                                 </p:cTn>
                               </p:par>
                               <p:par>
-                                <p:cTn id="43" presetID="42" presetClass="entr" presetSubtype="0" fill="hold" grpId="0" nodeType="withEffect">
+                                <p:cTn id="45" presetID="42" presetClass="entr" presetSubtype="0" fill="hold" nodeType="withEffect">
                                   <p:stCondLst>
                                     <p:cond delay="0"/>
                                   </p:stCondLst>
                                   <p:childTnLst>
                                     <p:set>
                                       <p:cBhvr>
-                                        <p:cTn id="44" dur="1" fill="hold">
+                                        <p:cTn id="46" dur="1" fill="hold">
                                           <p:stCondLst>
                                             <p:cond delay="0"/>
                                           </p:stCondLst>
@@ -5023,7 +5071,7 @@
                                     </p:set>
                                     <p:animEffect transition="in" filter="fade">
                                       <p:cBhvr>
-                                        <p:cTn id="45" dur="1000"/>
+                                        <p:cTn id="47" dur="1000"/>
                                         <p:tgtEl>
                                           <p:spTgt spid="12"/>
                                         </p:tgtEl>
@@ -5031,7 +5079,7 @@
                                     </p:animEffect>
                                     <p:anim calcmode="lin" valueType="num">
                                       <p:cBhvr>
-                                        <p:cTn id="46" dur="1000" fill="hold"/>
+                                        <p:cTn id="48" dur="1000" fill="hold"/>
                                         <p:tgtEl>
                                           <p:spTgt spid="12"/>
                                         </p:tgtEl>
@@ -5062,26 +5110,26 @@
                     </p:cTn>
                   </p:par>
                   <p:par>
-                    <p:cTn id="53" fill="hold">
+                    <p:cTn id="49" fill="hold">
                       <p:stCondLst>
                         <p:cond delay="indefinite"/>
                       </p:stCondLst>
                       <p:childTnLst>
                         <p:par>
-                          <p:cTn id="54" fill="hold">
+                          <p:cTn id="50" fill="hold">
                             <p:stCondLst>
                               <p:cond delay="0"/>
                             </p:stCondLst>
                             <p:childTnLst>
                               <p:par>
-                                <p:cTn id="49" presetID="42" presetClass="entr" presetSubtype="0" fill="hold" grpId="0" nodeType="clickEffect">
+                                <p:cTn id="51" presetID="42" presetClass="entr" presetSubtype="0" fill="hold" nodeType="clickEffect">
                                   <p:stCondLst>
                                     <p:cond delay="0"/>
                                   </p:stCondLst>
                                   <p:childTnLst>
                                     <p:set>
                                       <p:cBhvr>
-                                        <p:cTn id="50" dur="1" fill="hold">
+                                        <p:cTn id="52" dur="1" fill="hold">
                                           <p:stCondLst>
                                             <p:cond delay="0"/>
                                           </p:stCondLst>
@@ -5099,7 +5147,7 @@
                                     </p:set>
                                     <p:animEffect transition="in" filter="fade">
                                       <p:cBhvr>
-                                        <p:cTn id="51" dur="1000"/>
+                                        <p:cTn id="53" dur="1000"/>
                                         <p:tgtEl>
                                           <p:spTgt spid="13"/>
                                         </p:tgtEl>
@@ -5107,7 +5155,7 @@
                                     </p:animEffect>
                                     <p:anim calcmode="lin" valueType="num">
                                       <p:cBhvr>
-                                        <p:cTn id="52" dur="1000" fill="hold"/>
+                                        <p:cTn id="54" dur="1000" fill="hold"/>
                                         <p:tgtEl>
                                           <p:spTgt spid="13"/>
                                         </p:tgtEl>
@@ -5200,7 +5248,7 @@
           <a:bodyPr wrap="square" lIns="0" tIns="0" rIns="0" bIns="0" rtlCol="0" anchor="t"/>
           <a:lstStyle/>
           <a:p>
-            <a:pPr algn="l" indent="0" marL="0">
+            <a:pPr marL="0" indent="0" algn="l">
               <a:buNone/>
             </a:pPr>
             <a:r>
@@ -5239,11 +5287,11 @@
           <a:bodyPr wrap="square" lIns="0" tIns="0" rIns="0" bIns="0" rtlCol="0" anchor="t"/>
           <a:lstStyle/>
           <a:p>
-            <a:pPr algn="l" indent="0" marL="0">
+            <a:pPr marL="0" indent="0" algn="l">
               <a:buNone/>
             </a:pPr>
             <a:r>
-              <a:rPr lang="en-US" sz="1300" b="1" dirty="0">
+              <a:rPr lang="en-US" sz="2000" b="1" dirty="0">
                 <a:solidFill>
                   <a:srgbClr val="4F81BD"/>
                 </a:solidFill>
@@ -5251,9 +5299,9 @@
                 <a:ea typeface="Arial" pitchFamily="34" charset="-122"/>
                 <a:cs typeface="Arial" pitchFamily="34" charset="-120"/>
               </a:rPr>
-              <a:t>Ten minutes — the last practice</a:t>
-            </a:r>
-            <a:endParaRPr lang="en-US" sz="1600" dirty="0"/>
+              <a:t>Ten minutes → the last practice</a:t>
+            </a:r>
+            <a:endParaRPr lang="en-US" sz="2800" dirty="0"/>
           </a:p>
         </p:txBody>
       </p:sp>
@@ -5278,11 +5326,11 @@
           <a:bodyPr wrap="square" lIns="0" tIns="0" rIns="0" bIns="0" rtlCol="0" anchor="t"/>
           <a:lstStyle/>
           <a:p>
-            <a:pPr algn="l" indent="0" marL="0">
+            <a:pPr marL="0" indent="0" algn="l">
               <a:buNone/>
             </a:pPr>
             <a:r>
-              <a:rPr lang="en-US" sz="2000" b="1" dirty="0">
+              <a:rPr lang="en-US" sz="2800" b="1" dirty="0">
                 <a:solidFill>
                   <a:srgbClr val="1F497D"/>
                 </a:solidFill>
@@ -5292,11 +5340,8 @@
               </a:rPr>
               <a:t>1.  </a:t>
             </a:r>
-            <a:pPr algn="l" indent="0" marL="0">
-              <a:buNone/>
-            </a:pPr>
-            <a:r>
-              <a:rPr lang="en-US" sz="1800" dirty="0">
+            <a:r>
+              <a:rPr lang="en-US" sz="2400" dirty="0">
                 <a:solidFill>
                   <a:srgbClr val="000000"/>
                 </a:solidFill>
@@ -5304,9 +5349,9 @@
                 <a:ea typeface="Arial" pitchFamily="34" charset="-122"/>
                 <a:cs typeface="Arial" pitchFamily="34" charset="-120"/>
               </a:rPr>
-              <a:t>Who taught the faith to you — and what did it cost them? Name one person, and one thing they gave up.</a:t>
-            </a:r>
-            <a:endParaRPr lang="en-US" sz="1600" dirty="0"/>
+              <a:t>Who taught the faith to you → and what did it cost them? Name one person, and one thing they gave up.</a:t>
+            </a:r>
+            <a:endParaRPr lang="en-US" sz="2000" dirty="0"/>
           </a:p>
         </p:txBody>
       </p:sp>
@@ -5331,11 +5376,11 @@
           <a:bodyPr wrap="square" lIns="0" tIns="0" rIns="0" bIns="0" rtlCol="0" anchor="t"/>
           <a:lstStyle/>
           <a:p>
-            <a:pPr algn="l" indent="0" marL="0">
+            <a:pPr marL="0" indent="0" algn="l">
               <a:buNone/>
             </a:pPr>
             <a:r>
-              <a:rPr lang="en-US" sz="2000" b="1" dirty="0">
+              <a:rPr lang="en-US" sz="2800" b="1" dirty="0">
                 <a:solidFill>
                   <a:srgbClr val="1F497D"/>
                 </a:solidFill>
@@ -5345,11 +5390,8 @@
               </a:rPr>
               <a:t>2.  </a:t>
             </a:r>
-            <a:pPr algn="l" indent="0" marL="0">
-              <a:buNone/>
-            </a:pPr>
-            <a:r>
-              <a:rPr lang="en-US" sz="1800" dirty="0">
+            <a:r>
+              <a:rPr lang="en-US" sz="2400" dirty="0">
                 <a:solidFill>
                   <a:srgbClr val="000000"/>
                 </a:solidFill>
@@ -5357,62 +5399,9 @@
                 <a:ea typeface="Arial" pitchFamily="34" charset="-122"/>
                 <a:cs typeface="Arial" pitchFamily="34" charset="-120"/>
               </a:rPr>
-              <a:t>Whom will YOU teach — and what is the one concrete first step you’ll take this month?</a:t>
-            </a:r>
-            <a:endParaRPr lang="en-US" sz="1600" dirty="0"/>
-          </a:p>
-        </p:txBody>
-      </p:sp>
-      <p:sp>
-        <p:nvSpPr>
-          <p:cNvPr id="6" name="x3"/>
-          <p:cNvSpPr txBox="1"/>
-          <p:nvPr/>
-        </p:nvSpPr>
-        <p:spPr>
-          <a:xfrm>
-            <a:off x="457200" y="4892040"/>
-            <a:ext cx="8229600" cy="1005840"/>
-          </a:xfrm>
-          <a:prstGeom prst="rect">
-            <a:avLst/>
-          </a:prstGeom>
-          <a:noFill/>
-          <a:ln/>
-        </p:spPr>
-        <p:txBody>
-          <a:bodyPr wrap="square" lIns="0" tIns="0" rIns="0" bIns="0" rtlCol="0" anchor="t"/>
-          <a:lstStyle/>
-          <a:p>
-            <a:pPr algn="l" indent="0" marL="0">
-              <a:buNone/>
-            </a:pPr>
-            <a:r>
-              <a:rPr lang="en-US" sz="1400" b="1" dirty="0">
-                <a:solidFill>
-                  <a:srgbClr val="1F497D"/>
-                </a:solidFill>
-                <a:latin typeface="Arial" pitchFamily="34" charset="0"/>
-                <a:ea typeface="Arial" pitchFamily="34" charset="-122"/>
-                <a:cs typeface="Arial" pitchFamily="34" charset="-120"/>
-              </a:rPr>
-              <a:t>This is the course’s last discussion. </a:t>
-            </a:r>
-            <a:pPr algn="l" indent="0" marL="0">
-              <a:buNone/>
-            </a:pPr>
-            <a:r>
-              <a:rPr lang="en-US" sz="1400" i="1" dirty="0">
-                <a:solidFill>
-                  <a:srgbClr val="000000"/>
-                </a:solidFill>
-                <a:latin typeface="Arial" pitchFamily="34" charset="0"/>
-                <a:ea typeface="Arial" pitchFamily="34" charset="-122"/>
-                <a:cs typeface="Arial" pitchFamily="34" charset="-120"/>
-              </a:rPr>
-              <a:t>Let it be personal and hopeful — gratitude for those who handed it to us, resolve toward those we’ll hand it to.</a:t>
-            </a:r>
-            <a:endParaRPr lang="en-US" sz="1600" dirty="0"/>
+              <a:t>Whom will YOU teach → and what is the one concrete first step you’ll take this month?</a:t>
+            </a:r>
+            <a:endParaRPr lang="en-US" sz="2000" dirty="0"/>
           </a:p>
         </p:txBody>
       </p:sp>
@@ -5430,26 +5419,26 @@
               <p:cTn id="2" dur="indefinite" nodeType="mainSeq">
                 <p:childTnLst>
                   <p:par>
-                    <p:cTn id="7" fill="hold">
+                    <p:cTn id="3" fill="hold">
                       <p:stCondLst>
                         <p:cond delay="indefinite"/>
                       </p:stCondLst>
                       <p:childTnLst>
                         <p:par>
-                          <p:cTn id="8" fill="hold">
+                          <p:cTn id="4" fill="hold">
                             <p:stCondLst>
                               <p:cond delay="0"/>
                             </p:stCondLst>
                             <p:childTnLst>
                               <p:par>
-                                <p:cTn id="3" presetID="42" presetClass="entr" presetSubtype="0" fill="hold" grpId="0" nodeType="clickEffect">
+                                <p:cTn id="5" presetID="42" presetClass="entr" presetSubtype="0" fill="hold" nodeType="clickEffect">
                                   <p:stCondLst>
                                     <p:cond delay="0"/>
                                   </p:stCondLst>
                                   <p:childTnLst>
                                     <p:set>
                                       <p:cBhvr>
-                                        <p:cTn id="4" dur="1" fill="hold">
+                                        <p:cTn id="6" dur="1" fill="hold">
                                           <p:stCondLst>
                                             <p:cond delay="0"/>
                                           </p:stCondLst>
@@ -5467,7 +5456,7 @@
                                     </p:set>
                                     <p:animEffect transition="in" filter="fade">
                                       <p:cBhvr>
-                                        <p:cTn id="5" dur="1000"/>
+                                        <p:cTn id="7" dur="1000"/>
                                         <p:tgtEl>
                                           <p:spTgt spid="4"/>
                                         </p:tgtEl>
@@ -5475,7 +5464,7 @@
                                     </p:animEffect>
                                     <p:anim calcmode="lin" valueType="num">
                                       <p:cBhvr>
-                                        <p:cTn id="6" dur="1000" fill="hold"/>
+                                        <p:cTn id="8" dur="1000" fill="hold"/>
                                         <p:tgtEl>
                                           <p:spTgt spid="4"/>
                                         </p:tgtEl>
@@ -5506,26 +5495,26 @@
                     </p:cTn>
                   </p:par>
                   <p:par>
-                    <p:cTn id="13" fill="hold">
+                    <p:cTn id="9" fill="hold">
                       <p:stCondLst>
                         <p:cond delay="indefinite"/>
                       </p:stCondLst>
                       <p:childTnLst>
                         <p:par>
-                          <p:cTn id="14" fill="hold">
+                          <p:cTn id="10" fill="hold">
                             <p:stCondLst>
                               <p:cond delay="0"/>
                             </p:stCondLst>
                             <p:childTnLst>
                               <p:par>
-                                <p:cTn id="9" presetID="42" presetClass="entr" presetSubtype="0" fill="hold" grpId="0" nodeType="clickEffect">
+                                <p:cTn id="11" presetID="42" presetClass="entr" presetSubtype="0" fill="hold" nodeType="clickEffect">
                                   <p:stCondLst>
                                     <p:cond delay="0"/>
                                   </p:stCondLst>
                                   <p:childTnLst>
                                     <p:set>
                                       <p:cBhvr>
-                                        <p:cTn id="10" dur="1" fill="hold">
+                                        <p:cTn id="12" dur="1" fill="hold">
                                           <p:stCondLst>
                                             <p:cond delay="0"/>
                                           </p:stCondLst>
@@ -5543,7 +5532,7 @@
                                     </p:set>
                                     <p:animEffect transition="in" filter="fade">
                                       <p:cBhvr>
-                                        <p:cTn id="11" dur="1000"/>
+                                        <p:cTn id="13" dur="1000"/>
                                         <p:tgtEl>
                                           <p:spTgt spid="5"/>
                                         </p:tgtEl>
@@ -5551,85 +5540,9 @@
                                     </p:animEffect>
                                     <p:anim calcmode="lin" valueType="num">
                                       <p:cBhvr>
-                                        <p:cTn id="12" dur="1000" fill="hold"/>
+                                        <p:cTn id="14" dur="1000" fill="hold"/>
                                         <p:tgtEl>
                                           <p:spTgt spid="5"/>
-                                        </p:tgtEl>
-                                        <p:attrNameLst>
-                                          <p:attrName>ppt_y</p:attrName>
-                                        </p:attrNameLst>
-                                      </p:cBhvr>
-                                      <p:tavLst>
-                                        <p:tav tm="0">
-                                          <p:val>
-                                            <p:strVal val="#ppt_y+.1"/>
-                                          </p:val>
-                                        </p:tav>
-                                        <p:tav tm="100000">
-                                          <p:val>
-                                            <p:strVal val="#ppt_y"/>
-                                          </p:val>
-                                        </p:tav>
-                                      </p:tavLst>
-                                    </p:anim>
-                                  </p:childTnLst>
-                                </p:cTn>
-                              </p:par>
-                            </p:childTnLst>
-                          </p:cTn>
-                        </p:par>
-                      </p:childTnLst>
-                    </p:cTn>
-                  </p:par>
-                  <p:par>
-                    <p:cTn id="19" fill="hold">
-                      <p:stCondLst>
-                        <p:cond delay="indefinite"/>
-                      </p:stCondLst>
-                      <p:childTnLst>
-                        <p:par>
-                          <p:cTn id="20" fill="hold">
-                            <p:stCondLst>
-                              <p:cond delay="0"/>
-                            </p:stCondLst>
-                            <p:childTnLst>
-                              <p:par>
-                                <p:cTn id="15" presetID="42" presetClass="entr" presetSubtype="0" fill="hold" grpId="0" nodeType="clickEffect">
-                                  <p:stCondLst>
-                                    <p:cond delay="0"/>
-                                  </p:stCondLst>
-                                  <p:childTnLst>
-                                    <p:set>
-                                      <p:cBhvr>
-                                        <p:cTn id="16" dur="1" fill="hold">
-                                          <p:stCondLst>
-                                            <p:cond delay="0"/>
-                                          </p:stCondLst>
-                                        </p:cTn>
-                                        <p:tgtEl>
-                                          <p:spTgt spid="6"/>
-                                        </p:tgtEl>
-                                        <p:attrNameLst>
-                                          <p:attrName>style.visibility</p:attrName>
-                                        </p:attrNameLst>
-                                      </p:cBhvr>
-                                      <p:to>
-                                        <p:strVal val="visible"/>
-                                      </p:to>
-                                    </p:set>
-                                    <p:animEffect transition="in" filter="fade">
-                                      <p:cBhvr>
-                                        <p:cTn id="17" dur="1000"/>
-                                        <p:tgtEl>
-                                          <p:spTgt spid="6"/>
-                                        </p:tgtEl>
-                                      </p:cBhvr>
-                                    </p:animEffect>
-                                    <p:anim calcmode="lin" valueType="num">
-                                      <p:cBhvr>
-                                        <p:cTn id="18" dur="1000" fill="hold"/>
-                                        <p:tgtEl>
-                                          <p:spTgt spid="6"/>
                                         </p:tgtEl>
                                         <p:attrNameLst>
                                           <p:attrName>ppt_y</p:attrName>
@@ -5720,7 +5633,7 @@
           <a:bodyPr wrap="square" lIns="0" tIns="0" rIns="0" bIns="0" rtlCol="0" anchor="t"/>
           <a:lstStyle/>
           <a:p>
-            <a:pPr algn="l" indent="0" marL="0">
+            <a:pPr marL="0" indent="0" algn="l">
               <a:buNone/>
             </a:pPr>
             <a:r>
@@ -5759,11 +5672,11 @@
           <a:bodyPr wrap="square" lIns="0" tIns="0" rIns="0" bIns="0" rtlCol="0" anchor="t"/>
           <a:lstStyle/>
           <a:p>
-            <a:pPr algn="l" indent="0" marL="0">
+            <a:pPr marL="0" indent="0" algn="l">
               <a:buNone/>
             </a:pPr>
             <a:r>
-              <a:rPr lang="en-US" sz="1300" b="1" dirty="0">
+              <a:rPr lang="en-US" sz="2000" b="1" dirty="0">
                 <a:solidFill>
                   <a:srgbClr val="4F81BD"/>
                 </a:solidFill>
@@ -5773,7 +5686,7 @@
               </a:rPr>
               <a:t>Offer your sacrifices with the obedience of faith</a:t>
             </a:r>
-            <a:endParaRPr lang="en-US" sz="1600" dirty="0"/>
+            <a:endParaRPr lang="en-US" sz="2800" dirty="0"/>
           </a:p>
         </p:txBody>
       </p:sp>
@@ -5785,7 +5698,7 @@
         </p:nvSpPr>
         <p:spPr>
           <a:xfrm>
-            <a:off x="365760" y="1188720"/>
+            <a:off x="365760" y="1069848"/>
             <a:ext cx="8412480" cy="960120"/>
           </a:xfrm>
           <a:prstGeom prst="rect">
@@ -5798,11 +5711,11 @@
           <a:bodyPr wrap="square" lIns="0" tIns="0" rIns="0" bIns="0" rtlCol="0" anchor="t"/>
           <a:lstStyle/>
           <a:p>
-            <a:pPr algn="l" indent="0" marL="0">
+            <a:pPr marL="0" indent="0" algn="l">
               <a:buNone/>
             </a:pPr>
             <a:r>
-              <a:rPr lang="en-US" sz="1500" b="1" dirty="0">
+              <a:rPr lang="en-US" sz="1600" b="1" dirty="0">
                 <a:solidFill>
                   <a:srgbClr val="1F497D"/>
                 </a:solidFill>
@@ -5810,14 +5723,11 @@
                 <a:ea typeface="Arial" pitchFamily="34" charset="-122"/>
                 <a:cs typeface="Arial" pitchFamily="34" charset="-120"/>
               </a:rPr>
-              <a:t>The course’s standing assignment does not end today — it begins in earnest:
+              <a:t>The course’s standing assignment does not end today → it begins in earnest:
 </a:t>
             </a:r>
-            <a:pPr algn="l" indent="0" marL="0">
-              <a:buNone/>
-            </a:pPr>
-            <a:r>
-              <a:rPr lang="en-US" sz="1450" dirty="0">
+            <a:r>
+              <a:rPr lang="en-US" sz="1600" dirty="0">
                 <a:solidFill>
                   <a:srgbClr val="000000"/>
                 </a:solidFill>
@@ -5825,9 +5735,9 @@
                 <a:ea typeface="Arial" pitchFamily="34" charset="-122"/>
                 <a:cs typeface="Arial" pitchFamily="34" charset="-120"/>
               </a:rPr>
-              <a:t>One chapter. Before the phone. Your first minutes, not your last — the unblemished ones. Eager, and examining. Lay the mind on the altar and let God keep training your eyes.</a:t>
-            </a:r>
-            <a:endParaRPr lang="en-US" sz="1600" dirty="0"/>
+              <a:t>One chapter. Before the phone. Your first minutes, not your last → the unblemished ones. Eager, and examining. Lay the mind on the altar and let God keep training your eyes.</a:t>
+            </a:r>
+            <a:endParaRPr lang="en-US" dirty="0"/>
           </a:p>
         </p:txBody>
       </p:sp>
@@ -5839,7 +5749,7 @@
         </p:nvSpPr>
         <p:spPr>
           <a:xfrm>
-            <a:off x="365760" y="2331720"/>
+            <a:off x="365760" y="2148840"/>
             <a:ext cx="8412480" cy="1325880"/>
           </a:xfrm>
           <a:prstGeom prst="rect">
@@ -5852,11 +5762,11 @@
           <a:bodyPr wrap="square" lIns="0" tIns="0" rIns="0" bIns="0" rtlCol="0" anchor="t"/>
           <a:lstStyle/>
           <a:p>
-            <a:pPr algn="l" indent="0" marL="0">
+            <a:pPr marL="0" indent="0" algn="l">
               <a:buNone/>
             </a:pPr>
             <a:r>
-              <a:rPr lang="en-US" sz="1400" b="1" dirty="0">
+              <a:rPr lang="en-US" b="1" dirty="0">
                 <a:solidFill>
                   <a:srgbClr val="1F497D"/>
                 </a:solidFill>
@@ -5867,11 +5777,8 @@
               <a:t>The whole course, in one breath:
 </a:t>
             </a:r>
-            <a:pPr algn="l" indent="0" marL="0">
-              <a:buNone/>
-            </a:pPr>
-            <a:r>
-              <a:rPr lang="en-US" sz="1300" dirty="0">
+            <a:r>
+              <a:rPr lang="en-US" sz="1600" dirty="0">
                 <a:solidFill>
                   <a:srgbClr val="000000"/>
                 </a:solidFill>
@@ -5881,7 +5788,7 @@
               </a:rPr>
               <a:t>The Good is God’s own character (W1). Sacrifice makes worship visible (W2). Sincerity is not enough (W3). Righteousness is a gift (W4). Discernment is trained (W5–6). Every covenant tests faith (W7–9). Authority is received, and order serves communion (W10–11). And maturity’s destination is to teach (W12).</a:t>
             </a:r>
-            <a:endParaRPr lang="en-US" sz="1600" dirty="0"/>
+            <a:endParaRPr lang="en-US" sz="2000" dirty="0"/>
           </a:p>
         </p:txBody>
       </p:sp>
@@ -5906,11 +5813,11 @@
           <a:bodyPr wrap="square" lIns="0" tIns="0" rIns="0" bIns="0" rtlCol="0" anchor="t"/>
           <a:lstStyle/>
           <a:p>
-            <a:pPr algn="l" indent="0" marL="0">
+            <a:pPr marL="0" indent="0" algn="l">
               <a:buNone/>
             </a:pPr>
             <a:r>
-              <a:rPr lang="en-US" sz="1450" dirty="0">
+              <a:rPr lang="en-US" dirty="0">
                 <a:solidFill>
                   <a:srgbClr val="000000"/>
                 </a:solidFill>
@@ -5920,11 +5827,8 @@
               </a:rPr>
               <a:t>You began being asked, “Why do you call me good?”  </a:t>
             </a:r>
-            <a:pPr algn="l" indent="0" marL="0">
-              <a:buNone/>
-            </a:pPr>
-            <a:r>
-              <a:rPr lang="en-US" sz="1450" b="1" dirty="0">
+            <a:r>
+              <a:rPr lang="en-US" b="1" dirty="0">
                 <a:solidFill>
                   <a:srgbClr val="1F497D"/>
                 </a:solidFill>
@@ -5934,7 +5838,7 @@
               </a:rPr>
               <a:t>You end being told, “Go… teaching them to obey.”  From the question, to the commission.</a:t>
             </a:r>
-            <a:endParaRPr lang="en-US" sz="1600" dirty="0"/>
+            <a:endParaRPr lang="en-US" sz="2000" dirty="0"/>
           </a:p>
         </p:txBody>
       </p:sp>
@@ -5959,6 +5863,13 @@
           </a:solidFill>
           <a:ln/>
         </p:spPr>
+        <p:txBody>
+          <a:bodyPr/>
+          <a:lstStyle/>
+          <a:p>
+            <a:endParaRPr lang="en-US"/>
+          </a:p>
+        </p:txBody>
       </p:sp>
       <p:sp>
         <p:nvSpPr>
@@ -5981,7 +5892,7 @@
           <a:bodyPr wrap="square" lIns="0" tIns="0" rIns="0" bIns="0" rtlCol="0" anchor="ctr"/>
           <a:lstStyle/>
           <a:p>
-            <a:pPr algn="ctr" indent="0" marL="0">
+            <a:pPr marL="0" indent="0" algn="ctr">
               <a:buNone/>
             </a:pPr>
             <a:r>
@@ -6020,18 +5931,18 @@
           <a:bodyPr wrap="square" lIns="0" tIns="0" rIns="0" bIns="0" rtlCol="0" anchor="t"/>
           <a:lstStyle/>
           <a:p>
-            <a:pPr algn="ctr" indent="0" marL="0">
+            <a:pPr marL="0" indent="0" algn="ctr">
               <a:buNone/>
             </a:pPr>
             <a:r>
-              <a:rPr lang="en-US" sz="1300" b="1" u="sng" dirty="0">
+              <a:rPr lang="en-US" b="1" u="sng" dirty="0">
                 <a:solidFill>
                   <a:srgbClr val="4F81BD"/>
                 </a:solidFill>
                 <a:latin typeface="Arial" pitchFamily="34" charset="0"/>
                 <a:ea typeface="Arial" pitchFamily="34" charset="-122"/>
                 <a:cs typeface="Arial" pitchFamily="34" charset="-120"/>
-                <a:hlinkClick r:id="rId1" invalidUrl="" action="" tgtFrame="" tooltip="" history="1" highlightClick="0" endSnd="0">
+                <a:hlinkClick r:id="rId3">
                   <a:extLst>
                     <a:ext uri="{A12FA001-AC4F-418D-AE19-62706E023703}">
                       <ahyp:hlinkClr xmlns:ahyp="http://schemas.microsoft.com/office/drawing/2018/hyperlinkcolor" val="tx"/>
@@ -6039,9 +5950,38 @@
                   </a:extLst>
                 </a:hlinkClick>
               </a:rPr>
-              <a:t>https://tinyurl.com/TeachTheWord</a:t>
-            </a:r>
-            <a:endParaRPr lang="en-US" sz="1600" dirty="0"/>
+              <a:t>https://</a:t>
+            </a:r>
+            <a:r>
+              <a:rPr lang="en-US" b="1" u="sng" dirty="0" err="1">
+                <a:solidFill>
+                  <a:srgbClr val="4F81BD"/>
+                </a:solidFill>
+                <a:latin typeface="Arial" pitchFamily="34" charset="0"/>
+                <a:ea typeface="Arial" pitchFamily="34" charset="-122"/>
+                <a:cs typeface="Arial" pitchFamily="34" charset="-120"/>
+                <a:hlinkClick r:id="rId3">
+                  <a:extLst>
+                    <a:ext uri="{A12FA001-AC4F-418D-AE19-62706E023703}">
+                      <ahyp:hlinkClr xmlns:ahyp="http://schemas.microsoft.com/office/drawing/2018/hyperlinkcolor" val="tx"/>
+                    </a:ext>
+                  </a:extLst>
+                </a:hlinkClick>
+              </a:rPr>
+              <a:t>TeachTheWord</a:t>
+            </a:r>
+            <a:r>
+              <a:rPr lang="en-US" b="1" u="sng" dirty="0" err="1">
+                <a:solidFill>
+                  <a:srgbClr val="4F81BD"/>
+                </a:solidFill>
+                <a:latin typeface="Arial" pitchFamily="34" charset="0"/>
+                <a:ea typeface="Arial" pitchFamily="34" charset="-122"/>
+                <a:cs typeface="Arial" pitchFamily="34" charset="-120"/>
+              </a:rPr>
+              <a:t>.Church</a:t>
+            </a:r>
+            <a:endParaRPr lang="en-US" sz="2400" dirty="0"/>
           </a:p>
         </p:txBody>
       </p:sp>
@@ -6059,26 +5999,26 @@
               <p:cTn id="2" dur="indefinite" nodeType="mainSeq">
                 <p:childTnLst>
                   <p:par>
-                    <p:cTn id="7" fill="hold">
+                    <p:cTn id="3" fill="hold">
                       <p:stCondLst>
                         <p:cond delay="indefinite"/>
                       </p:stCondLst>
                       <p:childTnLst>
                         <p:par>
-                          <p:cTn id="8" fill="hold">
+                          <p:cTn id="4" fill="hold">
                             <p:stCondLst>
                               <p:cond delay="0"/>
                             </p:stCondLst>
                             <p:childTnLst>
                               <p:par>
-                                <p:cTn id="3" presetID="42" presetClass="entr" presetSubtype="0" fill="hold" grpId="0" nodeType="clickEffect">
+                                <p:cTn id="5" presetID="42" presetClass="entr" presetSubtype="0" fill="hold" nodeType="clickEffect">
                                   <p:stCondLst>
                                     <p:cond delay="0"/>
                                   </p:stCondLst>
                                   <p:childTnLst>
                                     <p:set>
                                       <p:cBhvr>
-                                        <p:cTn id="4" dur="1" fill="hold">
+                                        <p:cTn id="6" dur="1" fill="hold">
                                           <p:stCondLst>
                                             <p:cond delay="0"/>
                                           </p:stCondLst>
@@ -6096,7 +6036,7 @@
                                     </p:set>
                                     <p:animEffect transition="in" filter="fade">
                                       <p:cBhvr>
-                                        <p:cTn id="5" dur="1000"/>
+                                        <p:cTn id="7" dur="1000"/>
                                         <p:tgtEl>
                                           <p:spTgt spid="4"/>
                                         </p:tgtEl>
@@ -6104,7 +6044,7 @@
                                     </p:animEffect>
                                     <p:anim calcmode="lin" valueType="num">
                                       <p:cBhvr>
-                                        <p:cTn id="6" dur="1000" fill="hold"/>
+                                        <p:cTn id="8" dur="1000" fill="hold"/>
                                         <p:tgtEl>
                                           <p:spTgt spid="4"/>
                                         </p:tgtEl>
@@ -6135,26 +6075,26 @@
                     </p:cTn>
                   </p:par>
                   <p:par>
-                    <p:cTn id="13" fill="hold">
+                    <p:cTn id="9" fill="hold">
                       <p:stCondLst>
                         <p:cond delay="indefinite"/>
                       </p:stCondLst>
                       <p:childTnLst>
                         <p:par>
-                          <p:cTn id="14" fill="hold">
+                          <p:cTn id="10" fill="hold">
                             <p:stCondLst>
                               <p:cond delay="0"/>
                             </p:stCondLst>
                             <p:childTnLst>
                               <p:par>
-                                <p:cTn id="9" presetID="42" presetClass="entr" presetSubtype="0" fill="hold" grpId="0" nodeType="clickEffect">
+                                <p:cTn id="11" presetID="42" presetClass="entr" presetSubtype="0" fill="hold" nodeType="clickEffect">
                                   <p:stCondLst>
                                     <p:cond delay="0"/>
                                   </p:stCondLst>
                                   <p:childTnLst>
                                     <p:set>
                                       <p:cBhvr>
-                                        <p:cTn id="10" dur="1" fill="hold">
+                                        <p:cTn id="12" dur="1" fill="hold">
                                           <p:stCondLst>
                                             <p:cond delay="0"/>
                                           </p:stCondLst>
@@ -6172,7 +6112,7 @@
                                     </p:set>
                                     <p:animEffect transition="in" filter="fade">
                                       <p:cBhvr>
-                                        <p:cTn id="11" dur="1000"/>
+                                        <p:cTn id="13" dur="1000"/>
                                         <p:tgtEl>
                                           <p:spTgt spid="5"/>
                                         </p:tgtEl>
@@ -6180,7 +6120,7 @@
                                     </p:animEffect>
                                     <p:anim calcmode="lin" valueType="num">
                                       <p:cBhvr>
-                                        <p:cTn id="12" dur="1000" fill="hold"/>
+                                        <p:cTn id="14" dur="1000" fill="hold"/>
                                         <p:tgtEl>
                                           <p:spTgt spid="5"/>
                                         </p:tgtEl>
@@ -6211,26 +6151,26 @@
                     </p:cTn>
                   </p:par>
                   <p:par>
-                    <p:cTn id="19" fill="hold">
+                    <p:cTn id="15" fill="hold">
                       <p:stCondLst>
                         <p:cond delay="indefinite"/>
                       </p:stCondLst>
                       <p:childTnLst>
                         <p:par>
-                          <p:cTn id="20" fill="hold">
+                          <p:cTn id="16" fill="hold">
                             <p:stCondLst>
                               <p:cond delay="0"/>
                             </p:stCondLst>
                             <p:childTnLst>
                               <p:par>
-                                <p:cTn id="15" presetID="42" presetClass="entr" presetSubtype="0" fill="hold" grpId="0" nodeType="clickEffect">
+                                <p:cTn id="17" presetID="42" presetClass="entr" presetSubtype="0" fill="hold" nodeType="clickEffect">
                                   <p:stCondLst>
                                     <p:cond delay="0"/>
                                   </p:stCondLst>
                                   <p:childTnLst>
                                     <p:set>
                                       <p:cBhvr>
-                                        <p:cTn id="16" dur="1" fill="hold">
+                                        <p:cTn id="18" dur="1" fill="hold">
                                           <p:stCondLst>
                                             <p:cond delay="0"/>
                                           </p:stCondLst>
@@ -6248,7 +6188,7 @@
                                     </p:set>
                                     <p:animEffect transition="in" filter="fade">
                                       <p:cBhvr>
-                                        <p:cTn id="17" dur="1000"/>
+                                        <p:cTn id="19" dur="1000"/>
                                         <p:tgtEl>
                                           <p:spTgt spid="6"/>
                                         </p:tgtEl>
@@ -6256,7 +6196,7 @@
                                     </p:animEffect>
                                     <p:anim calcmode="lin" valueType="num">
                                       <p:cBhvr>
-                                        <p:cTn id="18" dur="1000" fill="hold"/>
+                                        <p:cTn id="20" dur="1000" fill="hold"/>
                                         <p:tgtEl>
                                           <p:spTgt spid="6"/>
                                         </p:tgtEl>
@@ -6287,26 +6227,26 @@
                     </p:cTn>
                   </p:par>
                   <p:par>
-                    <p:cTn id="29" fill="hold">
+                    <p:cTn id="21" fill="hold">
                       <p:stCondLst>
                         <p:cond delay="indefinite"/>
                       </p:stCondLst>
                       <p:childTnLst>
                         <p:par>
-                          <p:cTn id="30" fill="hold">
+                          <p:cTn id="22" fill="hold">
                             <p:stCondLst>
                               <p:cond delay="0"/>
                             </p:stCondLst>
                             <p:childTnLst>
                               <p:par>
-                                <p:cTn id="21" presetID="42" presetClass="entr" presetSubtype="0" fill="hold" grpId="0" nodeType="clickEffect">
+                                <p:cTn id="23" presetID="42" presetClass="entr" presetSubtype="0" fill="hold" nodeType="clickEffect">
                                   <p:stCondLst>
                                     <p:cond delay="0"/>
                                   </p:stCondLst>
                                   <p:childTnLst>
                                     <p:set>
                                       <p:cBhvr>
-                                        <p:cTn id="22" dur="1" fill="hold">
+                                        <p:cTn id="24" dur="1" fill="hold">
                                           <p:stCondLst>
                                             <p:cond delay="0"/>
                                           </p:stCondLst>
@@ -6324,7 +6264,7 @@
                                     </p:set>
                                     <p:animEffect transition="in" filter="fade">
                                       <p:cBhvr>
-                                        <p:cTn id="23" dur="1000"/>
+                                        <p:cTn id="25" dur="1000"/>
                                         <p:tgtEl>
                                           <p:spTgt spid="7"/>
                                         </p:tgtEl>
@@ -6332,7 +6272,7 @@
                                     </p:animEffect>
                                     <p:anim calcmode="lin" valueType="num">
                                       <p:cBhvr>
-                                        <p:cTn id="24" dur="1000" fill="hold"/>
+                                        <p:cTn id="26" dur="1000" fill="hold"/>
                                         <p:tgtEl>
                                           <p:spTgt spid="7"/>
                                         </p:tgtEl>
@@ -6357,14 +6297,14 @@
                                 </p:cTn>
                               </p:par>
                               <p:par>
-                                <p:cTn id="25" presetID="42" presetClass="entr" presetSubtype="0" fill="hold" grpId="0" nodeType="withEffect">
+                                <p:cTn id="27" presetID="42" presetClass="entr" presetSubtype="0" fill="hold" nodeType="withEffect">
                                   <p:stCondLst>
                                     <p:cond delay="0"/>
                                   </p:stCondLst>
                                   <p:childTnLst>
                                     <p:set>
                                       <p:cBhvr>
-                                        <p:cTn id="26" dur="1" fill="hold">
+                                        <p:cTn id="28" dur="1" fill="hold">
                                           <p:stCondLst>
                                             <p:cond delay="0"/>
                                           </p:stCondLst>
@@ -6382,7 +6322,7 @@
                                     </p:set>
                                     <p:animEffect transition="in" filter="fade">
                                       <p:cBhvr>
-                                        <p:cTn id="27" dur="1000"/>
+                                        <p:cTn id="29" dur="1000"/>
                                         <p:tgtEl>
                                           <p:spTgt spid="8"/>
                                         </p:tgtEl>
@@ -6390,7 +6330,7 @@
                                     </p:animEffect>
                                     <p:anim calcmode="lin" valueType="num">
                                       <p:cBhvr>
-                                        <p:cTn id="28" dur="1000" fill="hold"/>
+                                        <p:cTn id="30" dur="1000" fill="hold"/>
                                         <p:tgtEl>
                                           <p:spTgt spid="8"/>
                                         </p:tgtEl>
@@ -6738,4 +6678,319 @@
     </a:ext>
   </a:extLst>
 </a:theme>
+</file>
+
+<file path=ppt/theme/theme2.xml><?xml version="1.0" encoding="utf-8"?>
+<a:theme xmlns:a="http://schemas.openxmlformats.org/drawingml/2006/main" name="Office Theme">
+  <a:themeElements>
+    <a:clrScheme name="Office">
+      <a:dk1>
+        <a:sysClr val="windowText" lastClr="000000"/>
+      </a:dk1>
+      <a:lt1>
+        <a:sysClr val="window" lastClr="FFFFFF"/>
+      </a:lt1>
+      <a:dk2>
+        <a:srgbClr val="0E2841"/>
+      </a:dk2>
+      <a:lt2>
+        <a:srgbClr val="E8E8E8"/>
+      </a:lt2>
+      <a:accent1>
+        <a:srgbClr val="156082"/>
+      </a:accent1>
+      <a:accent2>
+        <a:srgbClr val="E97132"/>
+      </a:accent2>
+      <a:accent3>
+        <a:srgbClr val="196B24"/>
+      </a:accent3>
+      <a:accent4>
+        <a:srgbClr val="0F9ED5"/>
+      </a:accent4>
+      <a:accent5>
+        <a:srgbClr val="A02B93"/>
+      </a:accent5>
+      <a:accent6>
+        <a:srgbClr val="4EA72E"/>
+      </a:accent6>
+      <a:hlink>
+        <a:srgbClr val="467886"/>
+      </a:hlink>
+      <a:folHlink>
+        <a:srgbClr val="96607D"/>
+      </a:folHlink>
+    </a:clrScheme>
+    <a:fontScheme name="Office">
+      <a:majorFont>
+        <a:latin typeface="Aptos Display" panose="02110004020202020204"/>
+        <a:ea typeface=""/>
+        <a:cs typeface=""/>
+        <a:font script="Jpan" typeface="游ゴシック Light"/>
+        <a:font script="Hang" typeface="맑은 고딕"/>
+        <a:font script="Hans" typeface="等线 Light"/>
+        <a:font script="Hant" typeface="新細明體"/>
+        <a:font script="Arab" typeface="Times New Roman"/>
+        <a:font script="Hebr" typeface="Times New Roman"/>
+        <a:font script="Thai" typeface="Angsana New"/>
+        <a:font script="Ethi" typeface="Nyala"/>
+        <a:font script="Beng" typeface="Vrinda"/>
+        <a:font script="Gujr" typeface="Shruti"/>
+        <a:font script="Khmr" typeface="MoolBoran"/>
+        <a:font script="Knda" typeface="Tunga"/>
+        <a:font script="Guru" typeface="Raavi"/>
+        <a:font script="Cans" typeface="Euphemia"/>
+        <a:font script="Cher" typeface="Plantagenet Cherokee"/>
+        <a:font script="Yiii" typeface="Microsoft Yi Baiti"/>
+        <a:font script="Tibt" typeface="Microsoft Himalaya"/>
+        <a:font script="Thaa" typeface="MV Boli"/>
+        <a:font script="Deva" typeface="Mangal"/>
+        <a:font script="Telu" typeface="Gautami"/>
+        <a:font script="Taml" typeface="Latha"/>
+        <a:font script="Syrc" typeface="Estrangelo Edessa"/>
+        <a:font script="Orya" typeface="Kalinga"/>
+        <a:font script="Mlym" typeface="Kartika"/>
+        <a:font script="Laoo" typeface="DokChampa"/>
+        <a:font script="Sinh" typeface="Iskoola Pota"/>
+        <a:font script="Mong" typeface="Mongolian Baiti"/>
+        <a:font script="Viet" typeface="Times New Roman"/>
+        <a:font script="Uigh" typeface="Microsoft Uighur"/>
+        <a:font script="Geor" typeface="Sylfaen"/>
+        <a:font script="Armn" typeface="Arial"/>
+        <a:font script="Bugi" typeface="Leelawadee UI"/>
+        <a:font script="Bopo" typeface="Microsoft JhengHei"/>
+        <a:font script="Java" typeface="Javanese Text"/>
+        <a:font script="Lisu" typeface="Segoe UI"/>
+        <a:font script="Mymr" typeface="Myanmar Text"/>
+        <a:font script="Nkoo" typeface="Ebrima"/>
+        <a:font script="Olck" typeface="Nirmala UI"/>
+        <a:font script="Osma" typeface="Ebrima"/>
+        <a:font script="Phag" typeface="Phagspa"/>
+        <a:font script="Syrn" typeface="Estrangelo Edessa"/>
+        <a:font script="Syrj" typeface="Estrangelo Edessa"/>
+        <a:font script="Syre" typeface="Estrangelo Edessa"/>
+        <a:font script="Sora" typeface="Nirmala UI"/>
+        <a:font script="Tale" typeface="Microsoft Tai Le"/>
+        <a:font script="Talu" typeface="Microsoft New Tai Lue"/>
+        <a:font script="Tfng" typeface="Ebrima"/>
+      </a:majorFont>
+      <a:minorFont>
+        <a:latin typeface="Aptos" panose="02110004020202020204"/>
+        <a:ea typeface=""/>
+        <a:cs typeface=""/>
+        <a:font script="Jpan" typeface="游ゴシック"/>
+        <a:font script="Hang" typeface="맑은 고딕"/>
+        <a:font script="Hans" typeface="等线"/>
+        <a:font script="Hant" typeface="新細明體"/>
+        <a:font script="Arab" typeface="Arial"/>
+        <a:font script="Hebr" typeface="Arial"/>
+        <a:font script="Thai" typeface="Cordia New"/>
+        <a:font script="Ethi" typeface="Nyala"/>
+        <a:font script="Beng" typeface="Vrinda"/>
+        <a:font script="Gujr" typeface="Shruti"/>
+        <a:font script="Khmr" typeface="DaunPenh"/>
+        <a:font script="Knda" typeface="Tunga"/>
+        <a:font script="Guru" typeface="Raavi"/>
+        <a:font script="Cans" typeface="Euphemia"/>
+        <a:font script="Cher" typeface="Plantagenet Cherokee"/>
+        <a:font script="Yiii" typeface="Microsoft Yi Baiti"/>
+        <a:font script="Tibt" typeface="Microsoft Himalaya"/>
+        <a:font script="Thaa" typeface="MV Boli"/>
+        <a:font script="Deva" typeface="Mangal"/>
+        <a:font script="Telu" typeface="Gautami"/>
+        <a:font script="Taml" typeface="Latha"/>
+        <a:font script="Syrc" typeface="Estrangelo Edessa"/>
+        <a:font script="Orya" typeface="Kalinga"/>
+        <a:font script="Mlym" typeface="Kartika"/>
+        <a:font script="Laoo" typeface="DokChampa"/>
+        <a:font script="Sinh" typeface="Iskoola Pota"/>
+        <a:font script="Mong" typeface="Mongolian Baiti"/>
+        <a:font script="Viet" typeface="Arial"/>
+        <a:font script="Uigh" typeface="Microsoft Uighur"/>
+        <a:font script="Geor" typeface="Sylfaen"/>
+        <a:font script="Armn" typeface="Arial"/>
+        <a:font script="Bugi" typeface="Leelawadee UI"/>
+        <a:font script="Bopo" typeface="Microsoft JhengHei"/>
+        <a:font script="Java" typeface="Javanese Text"/>
+        <a:font script="Lisu" typeface="Segoe UI"/>
+        <a:font script="Mymr" typeface="Myanmar Text"/>
+        <a:font script="Nkoo" typeface="Ebrima"/>
+        <a:font script="Olck" typeface="Nirmala UI"/>
+        <a:font script="Osma" typeface="Ebrima"/>
+        <a:font script="Phag" typeface="Phagspa"/>
+        <a:font script="Syrn" typeface="Estrangelo Edessa"/>
+        <a:font script="Syrj" typeface="Estrangelo Edessa"/>
+        <a:font script="Syre" typeface="Estrangelo Edessa"/>
+        <a:font script="Sora" typeface="Nirmala UI"/>
+        <a:font script="Tale" typeface="Microsoft Tai Le"/>
+        <a:font script="Talu" typeface="Microsoft New Tai Lue"/>
+        <a:font script="Tfng" typeface="Ebrima"/>
+      </a:minorFont>
+    </a:fontScheme>
+    <a:fmtScheme name="Office">
+      <a:fillStyleLst>
+        <a:solidFill>
+          <a:schemeClr val="phClr"/>
+        </a:solidFill>
+        <a:gradFill rotWithShape="1">
+          <a:gsLst>
+            <a:gs pos="0">
+              <a:schemeClr val="phClr">
+                <a:lumMod val="110000"/>
+                <a:satMod val="105000"/>
+                <a:tint val="67000"/>
+              </a:schemeClr>
+            </a:gs>
+            <a:gs pos="50000">
+              <a:schemeClr val="phClr">
+                <a:lumMod val="105000"/>
+                <a:satMod val="103000"/>
+                <a:tint val="73000"/>
+              </a:schemeClr>
+            </a:gs>
+            <a:gs pos="100000">
+              <a:schemeClr val="phClr">
+                <a:lumMod val="105000"/>
+                <a:satMod val="109000"/>
+                <a:tint val="81000"/>
+              </a:schemeClr>
+            </a:gs>
+          </a:gsLst>
+          <a:lin ang="5400000" scaled="0"/>
+        </a:gradFill>
+        <a:gradFill rotWithShape="1">
+          <a:gsLst>
+            <a:gs pos="0">
+              <a:schemeClr val="phClr">
+                <a:satMod val="103000"/>
+                <a:lumMod val="102000"/>
+                <a:tint val="94000"/>
+              </a:schemeClr>
+            </a:gs>
+            <a:gs pos="50000">
+              <a:schemeClr val="phClr">
+                <a:satMod val="110000"/>
+                <a:lumMod val="100000"/>
+                <a:shade val="100000"/>
+              </a:schemeClr>
+            </a:gs>
+            <a:gs pos="100000">
+              <a:schemeClr val="phClr">
+                <a:lumMod val="99000"/>
+                <a:satMod val="120000"/>
+                <a:shade val="78000"/>
+              </a:schemeClr>
+            </a:gs>
+          </a:gsLst>
+          <a:lin ang="5400000" scaled="0"/>
+        </a:gradFill>
+      </a:fillStyleLst>
+      <a:lnStyleLst>
+        <a:ln w="12700" cap="flat" cmpd="sng" algn="ctr">
+          <a:solidFill>
+            <a:schemeClr val="phClr"/>
+          </a:solidFill>
+          <a:prstDash val="solid"/>
+          <a:miter lim="800000"/>
+        </a:ln>
+        <a:ln w="19050" cap="flat" cmpd="sng" algn="ctr">
+          <a:solidFill>
+            <a:schemeClr val="phClr"/>
+          </a:solidFill>
+          <a:prstDash val="solid"/>
+          <a:miter lim="800000"/>
+        </a:ln>
+        <a:ln w="25400" cap="flat" cmpd="sng" algn="ctr">
+          <a:solidFill>
+            <a:schemeClr val="phClr"/>
+          </a:solidFill>
+          <a:prstDash val="solid"/>
+          <a:miter lim="800000"/>
+        </a:ln>
+      </a:lnStyleLst>
+      <a:effectStyleLst>
+        <a:effectStyle>
+          <a:effectLst/>
+        </a:effectStyle>
+        <a:effectStyle>
+          <a:effectLst/>
+        </a:effectStyle>
+        <a:effectStyle>
+          <a:effectLst>
+            <a:outerShdw blurRad="57150" dist="19050" dir="5400000" algn="ctr" rotWithShape="0">
+              <a:srgbClr val="000000">
+                <a:alpha val="63000"/>
+              </a:srgbClr>
+            </a:outerShdw>
+          </a:effectLst>
+        </a:effectStyle>
+      </a:effectStyleLst>
+      <a:bgFillStyleLst>
+        <a:solidFill>
+          <a:schemeClr val="phClr"/>
+        </a:solidFill>
+        <a:solidFill>
+          <a:schemeClr val="phClr">
+            <a:tint val="95000"/>
+            <a:satMod val="170000"/>
+          </a:schemeClr>
+        </a:solidFill>
+        <a:gradFill rotWithShape="1">
+          <a:gsLst>
+            <a:gs pos="0">
+              <a:schemeClr val="phClr">
+                <a:tint val="93000"/>
+                <a:satMod val="150000"/>
+                <a:shade val="98000"/>
+                <a:lumMod val="102000"/>
+              </a:schemeClr>
+            </a:gs>
+            <a:gs pos="50000">
+              <a:schemeClr val="phClr">
+                <a:tint val="98000"/>
+                <a:satMod val="130000"/>
+                <a:shade val="90000"/>
+                <a:lumMod val="103000"/>
+              </a:schemeClr>
+            </a:gs>
+            <a:gs pos="100000">
+              <a:schemeClr val="phClr">
+                <a:shade val="63000"/>
+                <a:satMod val="120000"/>
+              </a:schemeClr>
+            </a:gs>
+          </a:gsLst>
+          <a:lin ang="5400000" scaled="0"/>
+        </a:gradFill>
+      </a:bgFillStyleLst>
+    </a:fmtScheme>
+  </a:themeElements>
+  <a:objectDefaults>
+    <a:lnDef>
+      <a:spPr/>
+      <a:bodyPr/>
+      <a:lstStyle/>
+      <a:style>
+        <a:lnRef idx="2">
+          <a:schemeClr val="accent1"/>
+        </a:lnRef>
+        <a:fillRef idx="0">
+          <a:schemeClr val="accent1"/>
+        </a:fillRef>
+        <a:effectRef idx="1">
+          <a:schemeClr val="accent1"/>
+        </a:effectRef>
+        <a:fontRef idx="minor">
+          <a:schemeClr val="tx1"/>
+        </a:fontRef>
+      </a:style>
+    </a:lnDef>
+  </a:objectDefaults>
+  <a:extraClrSchemeLst/>
+  <a:extLst>
+    <a:ext uri="{05A4C25C-085E-4340-85A3-A5531E510DB2}">
+      <thm15:themeFamily xmlns:thm15="http://schemas.microsoft.com/office/thememl/2012/main" name="Office Theme" id="{2E142A2C-CD16-42D6-873A-C26D2A0506FA}" vid="{1BDDFF52-6CD6-40A5-AB3C-68EB2F1E4D0A}"/>
+    </a:ext>
+  </a:extLst>
+</a:theme>
 </file>